--- a/public/lessons/year-6-maths/autumn/week-1/determine-the-value-of-each-digit/teaching-powerpoint-v1.pptx
+++ b/public/lessons/year-6-maths/autumn/week-1/determine-the-value-of-each-digit/teaching-powerpoint-v1.pptx
@@ -2,24 +2,24 @@
 <file path=ppt/presentation.xml><?xml version="1.0" encoding="utf-8"?>
 <p:presentation xmlns:p="http://schemas.openxmlformats.org/presentationml/2006/main">
   <p:sldMasterIdLst>
-    <p:sldMasterId xmlns:r="http://schemas.openxmlformats.org/officeDocument/2006/relationships" id="2147483648" r:id="R364e1266ea974664"/>
+    <p:sldMasterId xmlns:r="http://schemas.openxmlformats.org/officeDocument/2006/relationships" id="2147483648" r:id="R66e2a9d4e8e441eb"/>
   </p:sldMasterIdLst>
   <p:notesMasterIdLst>
-    <p:notesMasterId xmlns:r="http://schemas.openxmlformats.org/officeDocument/2006/relationships" r:id="R054e0d2ecab545ba"/>
+    <p:notesMasterId xmlns:r="http://schemas.openxmlformats.org/officeDocument/2006/relationships" r:id="Rd4ee2546addd4dd5"/>
   </p:notesMasterIdLst>
   <p:sldIdLst>
-    <p:sldId xmlns:r="http://schemas.openxmlformats.org/officeDocument/2006/relationships" id="256" r:id="R56f4ad7af3ac4bac"/>
-    <p:sldId xmlns:r="http://schemas.openxmlformats.org/officeDocument/2006/relationships" id="257" r:id="R066191eee2ab4018"/>
-    <p:sldId xmlns:r="http://schemas.openxmlformats.org/officeDocument/2006/relationships" id="258" r:id="Re36267b9a3a94563"/>
-    <p:sldId xmlns:r="http://schemas.openxmlformats.org/officeDocument/2006/relationships" id="259" r:id="R561d1372d74d4857"/>
-    <p:sldId xmlns:r="http://schemas.openxmlformats.org/officeDocument/2006/relationships" id="260" r:id="Rdf52841ee59340d1"/>
-    <p:sldId xmlns:r="http://schemas.openxmlformats.org/officeDocument/2006/relationships" id="261" r:id="Ree9be1ab78f04bbe"/>
-    <p:sldId xmlns:r="http://schemas.openxmlformats.org/officeDocument/2006/relationships" id="262" r:id="R9234aa5c72084d73"/>
-    <p:sldId xmlns:r="http://schemas.openxmlformats.org/officeDocument/2006/relationships" id="263" r:id="Raa76f7da8d784b0c"/>
-    <p:sldId xmlns:r="http://schemas.openxmlformats.org/officeDocument/2006/relationships" id="264" r:id="Re3c7685902d74eb1"/>
-    <p:sldId xmlns:r="http://schemas.openxmlformats.org/officeDocument/2006/relationships" id="265" r:id="R242ef4325f774501"/>
-    <p:sldId xmlns:r="http://schemas.openxmlformats.org/officeDocument/2006/relationships" id="266" r:id="R601fcbbf03884715"/>
-    <p:sldId xmlns:r="http://schemas.openxmlformats.org/officeDocument/2006/relationships" id="267" r:id="R19df061b256e4702"/>
+    <p:sldId xmlns:r="http://schemas.openxmlformats.org/officeDocument/2006/relationships" id="256" r:id="Rb224257dc6564fd1"/>
+    <p:sldId xmlns:r="http://schemas.openxmlformats.org/officeDocument/2006/relationships" id="257" r:id="Rc1acb787ba0b4a64"/>
+    <p:sldId xmlns:r="http://schemas.openxmlformats.org/officeDocument/2006/relationships" id="258" r:id="Ra36c364a64754a75"/>
+    <p:sldId xmlns:r="http://schemas.openxmlformats.org/officeDocument/2006/relationships" id="259" r:id="R6d23b87dab5b4910"/>
+    <p:sldId xmlns:r="http://schemas.openxmlformats.org/officeDocument/2006/relationships" id="260" r:id="Rb9f5e4dccfa545e5"/>
+    <p:sldId xmlns:r="http://schemas.openxmlformats.org/officeDocument/2006/relationships" id="261" r:id="R1b65c9c432f8485f"/>
+    <p:sldId xmlns:r="http://schemas.openxmlformats.org/officeDocument/2006/relationships" id="262" r:id="Rb5bd5cd86ab7445f"/>
+    <p:sldId xmlns:r="http://schemas.openxmlformats.org/officeDocument/2006/relationships" id="263" r:id="R52371f3456874beb"/>
+    <p:sldId xmlns:r="http://schemas.openxmlformats.org/officeDocument/2006/relationships" id="264" r:id="Rf09d46723ce2408f"/>
+    <p:sldId xmlns:r="http://schemas.openxmlformats.org/officeDocument/2006/relationships" id="265" r:id="Re8f32c64301a4191"/>
+    <p:sldId xmlns:r="http://schemas.openxmlformats.org/officeDocument/2006/relationships" id="266" r:id="Rd16427d133a640ca"/>
+    <p:sldId xmlns:r="http://schemas.openxmlformats.org/officeDocument/2006/relationships" id="267" r:id="R4eb9efa3e17b46f0"/>
   </p:sldIdLst>
   <p:sldSz cx="12192000" cy="6858000"/>
   <p:notesSz cx="6858000" cy="9144000"/>
@@ -873,7 +873,7 @@
           <a:lstStyle xmlns:a="http://schemas.openxmlformats.org/drawingml/2006/main"/>
           <a:p xmlns:a="http://schemas.openxmlformats.org/drawingml/2006/main">
             <a:r>
-              <a:t>I do. Reveal the question, setup and each calculation stage one click at a time. Pupils watch before copying. Model answer: 300,000.</a:t>
+              <a:t>I do. Reveal the question, then reveal each mathematical change one click at a time. Point to the numbers and operation that changed before moving to the next line. Final answer: 300,000.</a:t>
             </a:r>
           </a:p>
         </p:txBody>
@@ -1291,7 +1291,7 @@
   </p:cSld>
   <p:clrMap bg1="lt1" tx1="dk1" bg2="lt2" tx2="dk2" accent1="accent1" accent2="accent2" accent3="accent3" accent4="accent4" accent5="accent5" accent6="accent6" hlink="hlink" folHlink="folHlink"/>
   <p:sldLayoutIdLst>
-    <p:sldLayoutId xmlns:r="http://schemas.openxmlformats.org/officeDocument/2006/relationships" id="2147483649" r:id="Rca5c1d7dcf724d3a"/>
+    <p:sldLayoutId xmlns:r="http://schemas.openxmlformats.org/officeDocument/2006/relationships" id="2147483649" r:id="R287024300e774881"/>
   </p:sldLayoutIdLst>
   <p:txStyles>
     <p:titleStyle>
@@ -1842,7 +1842,7 @@
           <p:cNvPr id="12" name="">
             <a:extLst xmlns:a="http://schemas.openxmlformats.org/drawingml/2006/main">
               <a:ext uri="{FF2B5EF4-FFF2-40B4-BE49-F238E27FC236}">
-                <a16:creationId xmlns:a16="http://schemas.microsoft.com/office/drawing/2014/main" id="{676B2339-A4CF-4E4E-B1E2-9A4E30EE0FEF}"/>
+                <a16:creationId xmlns:a16="http://schemas.microsoft.com/office/drawing/2014/main" id="{87587028-1B6B-4354-A618-C303C1BCA651}"/>
               </a:ext>
             </a:extLst>
           </p:cNvPr>
@@ -1874,7 +1874,7 @@
           <p:cNvPr id="2" name="">
             <a:extLst xmlns:a="http://schemas.openxmlformats.org/drawingml/2006/main">
               <a:ext uri="{FF2B5EF4-FFF2-40B4-BE49-F238E27FC236}">
-                <a16:creationId xmlns:a16="http://schemas.microsoft.com/office/drawing/2014/main" id="{F30357AB-6F1B-4469-A197-683967FDF01D}"/>
+                <a16:creationId xmlns:a16="http://schemas.microsoft.com/office/drawing/2014/main" id="{6AAB4CAE-2B63-4889-BEE5-D13A91B5859D}"/>
               </a:ext>
             </a:extLst>
           </p:cNvPr>
@@ -1931,7 +1931,7 @@
           <p:cNvPr id="3" name="">
             <a:extLst xmlns:a="http://schemas.openxmlformats.org/drawingml/2006/main">
               <a:ext uri="{FF2B5EF4-FFF2-40B4-BE49-F238E27FC236}">
-                <a16:creationId xmlns:a16="http://schemas.microsoft.com/office/drawing/2014/main" id="{46060E49-A1E8-440E-B73B-82ABEBBB5E39}"/>
+                <a16:creationId xmlns:a16="http://schemas.microsoft.com/office/drawing/2014/main" id="{40A62F17-FC93-4E27-9CB9-5D14BDBC0A68}"/>
               </a:ext>
             </a:extLst>
           </p:cNvPr>
@@ -1965,7 +1965,7 @@
           <p:cNvPr id="4" name="">
             <a:extLst xmlns:a="http://schemas.openxmlformats.org/drawingml/2006/main">
               <a:ext uri="{FF2B5EF4-FFF2-40B4-BE49-F238E27FC236}">
-                <a16:creationId xmlns:a16="http://schemas.microsoft.com/office/drawing/2014/main" id="{C03E9335-61E8-4183-825E-F6AA901F8DD6}"/>
+                <a16:creationId xmlns:a16="http://schemas.microsoft.com/office/drawing/2014/main" id="{7AF47531-9C44-42B3-8817-FEB61F8D9FD8}"/>
               </a:ext>
             </a:extLst>
           </p:cNvPr>
@@ -2022,7 +2022,7 @@
           <p:cNvPr id="5" name="">
             <a:extLst xmlns:a="http://schemas.openxmlformats.org/drawingml/2006/main">
               <a:ext uri="{FF2B5EF4-FFF2-40B4-BE49-F238E27FC236}">
-                <a16:creationId xmlns:a16="http://schemas.microsoft.com/office/drawing/2014/main" id="{3D161CC0-DF76-465E-9DC1-EF4B5E1DB952}"/>
+                <a16:creationId xmlns:a16="http://schemas.microsoft.com/office/drawing/2014/main" id="{6649B95A-2260-459A-9E14-C52415E76805}"/>
               </a:ext>
             </a:extLst>
           </p:cNvPr>
@@ -2079,7 +2079,7 @@
           <p:cNvPr id="6" name="">
             <a:extLst xmlns:a="http://schemas.openxmlformats.org/drawingml/2006/main">
               <a:ext uri="{FF2B5EF4-FFF2-40B4-BE49-F238E27FC236}">
-                <a16:creationId xmlns:a16="http://schemas.microsoft.com/office/drawing/2014/main" id="{D3662463-E07E-44D7-A44F-7BF64C68F741}"/>
+                <a16:creationId xmlns:a16="http://schemas.microsoft.com/office/drawing/2014/main" id="{59F7B92D-57CC-46C0-B138-399B6AF8EA96}"/>
               </a:ext>
             </a:extLst>
           </p:cNvPr>
@@ -2113,7 +2113,7 @@
           <p:cNvPr id="7" name="">
             <a:extLst xmlns:a="http://schemas.openxmlformats.org/drawingml/2006/main">
               <a:ext uri="{FF2B5EF4-FFF2-40B4-BE49-F238E27FC236}">
-                <a16:creationId xmlns:a16="http://schemas.microsoft.com/office/drawing/2014/main" id="{BB68C1C1-C8BC-4895-BCB7-64E7BEA7AB66}"/>
+                <a16:creationId xmlns:a16="http://schemas.microsoft.com/office/drawing/2014/main" id="{B3D14D2B-043D-45EE-B051-E80F466B9978}"/>
               </a:ext>
             </a:extLst>
           </p:cNvPr>
@@ -2170,7 +2170,7 @@
           <p:cNvPr id="8" name="">
             <a:extLst xmlns:a="http://schemas.openxmlformats.org/drawingml/2006/main">
               <a:ext uri="{FF2B5EF4-FFF2-40B4-BE49-F238E27FC236}">
-                <a16:creationId xmlns:a16="http://schemas.microsoft.com/office/drawing/2014/main" id="{53AAA662-03F6-4CA9-91F6-E72AAA22210C}"/>
+                <a16:creationId xmlns:a16="http://schemas.microsoft.com/office/drawing/2014/main" id="{0372389E-E3DF-4FA4-8A2A-CC4A0A129E88}"/>
               </a:ext>
             </a:extLst>
           </p:cNvPr>
@@ -2227,7 +2227,7 @@
           <p:cNvPr id="9" name="">
             <a:extLst xmlns:a="http://schemas.openxmlformats.org/drawingml/2006/main">
               <a:ext uri="{FF2B5EF4-FFF2-40B4-BE49-F238E27FC236}">
-                <a16:creationId xmlns:a16="http://schemas.microsoft.com/office/drawing/2014/main" id="{8519CB90-AC31-41B2-87F4-853BDC76CEAF}"/>
+                <a16:creationId xmlns:a16="http://schemas.microsoft.com/office/drawing/2014/main" id="{62A8A811-8B59-4D49-9915-19FCD2749DE5}"/>
               </a:ext>
             </a:extLst>
           </p:cNvPr>
@@ -2284,7 +2284,7 @@
           <p:cNvPr id="10" name="">
             <a:extLst xmlns:a="http://schemas.openxmlformats.org/drawingml/2006/main">
               <a:ext uri="{FF2B5EF4-FFF2-40B4-BE49-F238E27FC236}">
-                <a16:creationId xmlns:a16="http://schemas.microsoft.com/office/drawing/2014/main" id="{E24F2E56-BF6F-4E0C-9CF0-5C8431C39A10}"/>
+                <a16:creationId xmlns:a16="http://schemas.microsoft.com/office/drawing/2014/main" id="{EB86F3AC-E81B-4EA7-A2A7-BD48EA552581}"/>
               </a:ext>
             </a:extLst>
           </p:cNvPr>
@@ -2341,7 +2341,7 @@
           <p:cNvPr id="11" name="">
             <a:extLst xmlns:a="http://schemas.openxmlformats.org/drawingml/2006/main">
               <a:ext uri="{FF2B5EF4-FFF2-40B4-BE49-F238E27FC236}">
-                <a16:creationId xmlns:a16="http://schemas.microsoft.com/office/drawing/2014/main" id="{61E892E2-0A88-4CFC-B8B3-735343BC8DB7}"/>
+                <a16:creationId xmlns:a16="http://schemas.microsoft.com/office/drawing/2014/main" id="{C0881966-9791-4A48-AD3F-478CA605C7FB}"/>
               </a:ext>
             </a:extLst>
           </p:cNvPr>
@@ -2396,7 +2396,7 @@
     </p:spTree>
     <p:extLst>
       <p:ext uri="{BB962C8B-B14F-4D97-AF65-F5344CB8AC3E}">
-        <p14:creationId xmlns:p14="http://schemas.microsoft.com/office/powerpoint/2010/main" val="295707448"/>
+        <p14:creationId xmlns:p14="http://schemas.microsoft.com/office/powerpoint/2010/main" val="1890168045"/>
       </p:ext>
     </p:extLst>
   </p:cSld>
@@ -2427,7 +2427,7 @@
           <p:cNvPr id="14" name="">
             <a:extLst xmlns:a="http://schemas.openxmlformats.org/drawingml/2006/main">
               <a:ext uri="{FF2B5EF4-FFF2-40B4-BE49-F238E27FC236}">
-                <a16:creationId xmlns:a16="http://schemas.microsoft.com/office/drawing/2014/main" id="{9D57FDB2-13A1-4B33-9CA1-ADBC03CAAABD}"/>
+                <a16:creationId xmlns:a16="http://schemas.microsoft.com/office/drawing/2014/main" id="{C94C2F51-C008-447A-853E-9A4DDCA51E28}"/>
               </a:ext>
             </a:extLst>
           </p:cNvPr>
@@ -2459,7 +2459,7 @@
           <p:cNvPr id="2" name="">
             <a:extLst xmlns:a="http://schemas.openxmlformats.org/drawingml/2006/main">
               <a:ext uri="{FF2B5EF4-FFF2-40B4-BE49-F238E27FC236}">
-                <a16:creationId xmlns:a16="http://schemas.microsoft.com/office/drawing/2014/main" id="{5E7404BF-C8BE-42D6-A45D-CCA8BB794B18}"/>
+                <a16:creationId xmlns:a16="http://schemas.microsoft.com/office/drawing/2014/main" id="{26F03F24-5966-4427-9C01-B859F5FCFDF0}"/>
               </a:ext>
             </a:extLst>
           </p:cNvPr>
@@ -2516,7 +2516,7 @@
           <p:cNvPr id="3" name="">
             <a:extLst xmlns:a="http://schemas.openxmlformats.org/drawingml/2006/main">
               <a:ext uri="{FF2B5EF4-FFF2-40B4-BE49-F238E27FC236}">
-                <a16:creationId xmlns:a16="http://schemas.microsoft.com/office/drawing/2014/main" id="{6A2F9347-E903-4A8E-89FB-2753703EA075}"/>
+                <a16:creationId xmlns:a16="http://schemas.microsoft.com/office/drawing/2014/main" id="{535B7C0A-5795-4848-A5C9-0924A66E79DB}"/>
               </a:ext>
             </a:extLst>
           </p:cNvPr>
@@ -2548,7 +2548,7 @@
           <p:cNvPr id="4" name="">
             <a:extLst xmlns:a="http://schemas.openxmlformats.org/drawingml/2006/main">
               <a:ext uri="{FF2B5EF4-FFF2-40B4-BE49-F238E27FC236}">
-                <a16:creationId xmlns:a16="http://schemas.microsoft.com/office/drawing/2014/main" id="{5B31B978-1A2D-47B6-92A6-8541DC3D34CC}"/>
+                <a16:creationId xmlns:a16="http://schemas.microsoft.com/office/drawing/2014/main" id="{EAB26EAA-ACCF-439D-9A0D-6B1A9A08FFBC}"/>
               </a:ext>
             </a:extLst>
           </p:cNvPr>
@@ -2605,7 +2605,7 @@
           <p:cNvPr id="5" name="">
             <a:extLst xmlns:a="http://schemas.openxmlformats.org/drawingml/2006/main">
               <a:ext uri="{FF2B5EF4-FFF2-40B4-BE49-F238E27FC236}">
-                <a16:creationId xmlns:a16="http://schemas.microsoft.com/office/drawing/2014/main" id="{00BA9B09-1D96-4955-89F4-F9529E249A46}"/>
+                <a16:creationId xmlns:a16="http://schemas.microsoft.com/office/drawing/2014/main" id="{DCFDA61A-123E-4807-8D92-C3795874BAC1}"/>
               </a:ext>
             </a:extLst>
           </p:cNvPr>
@@ -2662,7 +2662,7 @@
           <p:cNvPr id="6" name="">
             <a:extLst xmlns:a="http://schemas.openxmlformats.org/drawingml/2006/main">
               <a:ext uri="{FF2B5EF4-FFF2-40B4-BE49-F238E27FC236}">
-                <a16:creationId xmlns:a16="http://schemas.microsoft.com/office/drawing/2014/main" id="{A3DC2A42-7BDB-4FF2-98C5-1257CD6FD048}"/>
+                <a16:creationId xmlns:a16="http://schemas.microsoft.com/office/drawing/2014/main" id="{344471BE-59B3-4B84-A7B0-5F16C0514637}"/>
               </a:ext>
             </a:extLst>
           </p:cNvPr>
@@ -2719,7 +2719,7 @@
           <p:cNvPr id="7" name="">
             <a:extLst xmlns:a="http://schemas.openxmlformats.org/drawingml/2006/main">
               <a:ext uri="{FF2B5EF4-FFF2-40B4-BE49-F238E27FC236}">
-                <a16:creationId xmlns:a16="http://schemas.microsoft.com/office/drawing/2014/main" id="{5BA9BEC6-36B9-46EE-954F-5F8BEFE2874D}"/>
+                <a16:creationId xmlns:a16="http://schemas.microsoft.com/office/drawing/2014/main" id="{8DBB0286-3FE3-4719-B6D9-E967B892C859}"/>
               </a:ext>
             </a:extLst>
           </p:cNvPr>
@@ -2751,7 +2751,7 @@
           <p:cNvPr id="8" name="">
             <a:extLst xmlns:a="http://schemas.openxmlformats.org/drawingml/2006/main">
               <a:ext uri="{FF2B5EF4-FFF2-40B4-BE49-F238E27FC236}">
-                <a16:creationId xmlns:a16="http://schemas.microsoft.com/office/drawing/2014/main" id="{0DC8A363-B401-4AB3-AEFE-666CC9A017E0}"/>
+                <a16:creationId xmlns:a16="http://schemas.microsoft.com/office/drawing/2014/main" id="{316F32DC-E80F-40CD-993F-67904A1154D9}"/>
               </a:ext>
             </a:extLst>
           </p:cNvPr>
@@ -2808,7 +2808,7 @@
           <p:cNvPr id="9" name="">
             <a:extLst xmlns:a="http://schemas.openxmlformats.org/drawingml/2006/main">
               <a:ext uri="{FF2B5EF4-FFF2-40B4-BE49-F238E27FC236}">
-                <a16:creationId xmlns:a16="http://schemas.microsoft.com/office/drawing/2014/main" id="{3EAB215E-446B-4734-A331-78CE08A40ABB}"/>
+                <a16:creationId xmlns:a16="http://schemas.microsoft.com/office/drawing/2014/main" id="{D4F20442-801A-483A-81B6-3A025E64D8DE}"/>
               </a:ext>
             </a:extLst>
           </p:cNvPr>
@@ -2865,7 +2865,7 @@
           <p:cNvPr id="10" name="">
             <a:extLst xmlns:a="http://schemas.openxmlformats.org/drawingml/2006/main">
               <a:ext uri="{FF2B5EF4-FFF2-40B4-BE49-F238E27FC236}">
-                <a16:creationId xmlns:a16="http://schemas.microsoft.com/office/drawing/2014/main" id="{B7A42E30-B83E-4316-B117-3C792378FA88}"/>
+                <a16:creationId xmlns:a16="http://schemas.microsoft.com/office/drawing/2014/main" id="{D1A693EC-039D-4576-ADD9-970B91B68EE4}"/>
               </a:ext>
             </a:extLst>
           </p:cNvPr>
@@ -2922,7 +2922,7 @@
           <p:cNvPr id="11" name="">
             <a:extLst xmlns:a="http://schemas.openxmlformats.org/drawingml/2006/main">
               <a:ext uri="{FF2B5EF4-FFF2-40B4-BE49-F238E27FC236}">
-                <a16:creationId xmlns:a16="http://schemas.microsoft.com/office/drawing/2014/main" id="{6FEAE914-A0AF-43E4-A2FB-45869CD3D128}"/>
+                <a16:creationId xmlns:a16="http://schemas.microsoft.com/office/drawing/2014/main" id="{54C6FB81-3320-4124-A973-DDC8B0C26F23}"/>
               </a:ext>
             </a:extLst>
           </p:cNvPr>
@@ -2979,7 +2979,7 @@
           <p:cNvPr id="12" name="">
             <a:extLst xmlns:a="http://schemas.openxmlformats.org/drawingml/2006/main">
               <a:ext uri="{FF2B5EF4-FFF2-40B4-BE49-F238E27FC236}">
-                <a16:creationId xmlns:a16="http://schemas.microsoft.com/office/drawing/2014/main" id="{97BB15FC-31D2-49D3-A5C7-9A5D0AD4E6F6}"/>
+                <a16:creationId xmlns:a16="http://schemas.microsoft.com/office/drawing/2014/main" id="{3A6F5916-A92E-4DFA-9090-49453467A2DD}"/>
               </a:ext>
             </a:extLst>
           </p:cNvPr>
@@ -3036,7 +3036,7 @@
           <p:cNvPr id="13" name="">
             <a:extLst xmlns:a="http://schemas.openxmlformats.org/drawingml/2006/main">
               <a:ext uri="{FF2B5EF4-FFF2-40B4-BE49-F238E27FC236}">
-                <a16:creationId xmlns:a16="http://schemas.microsoft.com/office/drawing/2014/main" id="{1809A991-09A1-44C0-97AF-58EAA69053E8}"/>
+                <a16:creationId xmlns:a16="http://schemas.microsoft.com/office/drawing/2014/main" id="{BABECEFC-5AE6-4014-9BD1-CB157986E66B}"/>
               </a:ext>
             </a:extLst>
           </p:cNvPr>
@@ -3091,7 +3091,7 @@
     </p:spTree>
     <p:extLst>
       <p:ext uri="{BB962C8B-B14F-4D97-AF65-F5344CB8AC3E}">
-        <p14:creationId xmlns:p14="http://schemas.microsoft.com/office/powerpoint/2010/main" val="1698320997"/>
+        <p14:creationId xmlns:p14="http://schemas.microsoft.com/office/powerpoint/2010/main" val="999788694"/>
       </p:ext>
     </p:extLst>
   </p:cSld>
@@ -3292,7 +3292,7 @@
           <p:cNvPr id="19" name="">
             <a:extLst xmlns:a="http://schemas.openxmlformats.org/drawingml/2006/main">
               <a:ext uri="{FF2B5EF4-FFF2-40B4-BE49-F238E27FC236}">
-                <a16:creationId xmlns:a16="http://schemas.microsoft.com/office/drawing/2014/main" id="{35F85263-2506-4D13-A53E-6CFF4110040C}"/>
+                <a16:creationId xmlns:a16="http://schemas.microsoft.com/office/drawing/2014/main" id="{3C3710DF-92EC-4E8C-A562-A6939246F7F1}"/>
               </a:ext>
             </a:extLst>
           </p:cNvPr>
@@ -3324,7 +3324,7 @@
           <p:cNvPr id="2" name="">
             <a:extLst xmlns:a="http://schemas.openxmlformats.org/drawingml/2006/main">
               <a:ext uri="{FF2B5EF4-FFF2-40B4-BE49-F238E27FC236}">
-                <a16:creationId xmlns:a16="http://schemas.microsoft.com/office/drawing/2014/main" id="{60BCDCA2-C9CE-4554-9F64-57DCBF137FEA}"/>
+                <a16:creationId xmlns:a16="http://schemas.microsoft.com/office/drawing/2014/main" id="{2E771621-EEFA-44D8-B005-E53A410A4EEC}"/>
               </a:ext>
             </a:extLst>
           </p:cNvPr>
@@ -3381,7 +3381,7 @@
           <p:cNvPr id="3" name="">
             <a:extLst xmlns:a="http://schemas.openxmlformats.org/drawingml/2006/main">
               <a:ext uri="{FF2B5EF4-FFF2-40B4-BE49-F238E27FC236}">
-                <a16:creationId xmlns:a16="http://schemas.microsoft.com/office/drawing/2014/main" id="{87312C36-7C6C-458B-9653-3524C97A1FAC}"/>
+                <a16:creationId xmlns:a16="http://schemas.microsoft.com/office/drawing/2014/main" id="{2563F153-3154-450F-9FD2-EE645467C177}"/>
               </a:ext>
             </a:extLst>
           </p:cNvPr>
@@ -3413,7 +3413,7 @@
           <p:cNvPr id="4" name="">
             <a:extLst xmlns:a="http://schemas.openxmlformats.org/drawingml/2006/main">
               <a:ext uri="{FF2B5EF4-FFF2-40B4-BE49-F238E27FC236}">
-                <a16:creationId xmlns:a16="http://schemas.microsoft.com/office/drawing/2014/main" id="{07A3F4D0-7D74-4B98-974C-DD313F2D5E91}"/>
+                <a16:creationId xmlns:a16="http://schemas.microsoft.com/office/drawing/2014/main" id="{62B4D6D7-2F6D-4266-AF94-5FA49A14D8BF}"/>
               </a:ext>
             </a:extLst>
           </p:cNvPr>
@@ -3470,7 +3470,7 @@
           <p:cNvPr id="5" name="">
             <a:extLst xmlns:a="http://schemas.openxmlformats.org/drawingml/2006/main">
               <a:ext uri="{FF2B5EF4-FFF2-40B4-BE49-F238E27FC236}">
-                <a16:creationId xmlns:a16="http://schemas.microsoft.com/office/drawing/2014/main" id="{1ACFAE72-A25B-46B4-9AD5-7E2334AD1D1A}"/>
+                <a16:creationId xmlns:a16="http://schemas.microsoft.com/office/drawing/2014/main" id="{206C1015-9CD4-4A77-8DC2-E2282529E62E}"/>
               </a:ext>
             </a:extLst>
           </p:cNvPr>
@@ -3527,7 +3527,7 @@
           <p:cNvPr id="6" name="">
             <a:extLst xmlns:a="http://schemas.openxmlformats.org/drawingml/2006/main">
               <a:ext uri="{FF2B5EF4-FFF2-40B4-BE49-F238E27FC236}">
-                <a16:creationId xmlns:a16="http://schemas.microsoft.com/office/drawing/2014/main" id="{3E7A40C8-04DA-4AFB-8E02-504070284FBE}"/>
+                <a16:creationId xmlns:a16="http://schemas.microsoft.com/office/drawing/2014/main" id="{22EF75E8-99C4-44D2-A383-7D90BA261EB0}"/>
               </a:ext>
             </a:extLst>
           </p:cNvPr>
@@ -3584,7 +3584,7 @@
           <p:cNvPr id="7" name="">
             <a:extLst xmlns:a="http://schemas.openxmlformats.org/drawingml/2006/main">
               <a:ext uri="{FF2B5EF4-FFF2-40B4-BE49-F238E27FC236}">
-                <a16:creationId xmlns:a16="http://schemas.microsoft.com/office/drawing/2014/main" id="{59BEE9D5-1527-4FAD-9F21-D8516515904D}"/>
+                <a16:creationId xmlns:a16="http://schemas.microsoft.com/office/drawing/2014/main" id="{AB605AD9-1828-478F-A16C-2AF3C52EF990}"/>
               </a:ext>
             </a:extLst>
           </p:cNvPr>
@@ -3616,7 +3616,7 @@
           <p:cNvPr id="8" name="">
             <a:extLst xmlns:a="http://schemas.openxmlformats.org/drawingml/2006/main">
               <a:ext uri="{FF2B5EF4-FFF2-40B4-BE49-F238E27FC236}">
-                <a16:creationId xmlns:a16="http://schemas.microsoft.com/office/drawing/2014/main" id="{807A384E-BCBA-48DE-888E-F5A7BE5AD790}"/>
+                <a16:creationId xmlns:a16="http://schemas.microsoft.com/office/drawing/2014/main" id="{75BB2F3C-8438-4136-AFA1-990E4A709A06}"/>
               </a:ext>
             </a:extLst>
           </p:cNvPr>
@@ -3673,7 +3673,7 @@
           <p:cNvPr id="9" name="">
             <a:extLst xmlns:a="http://schemas.openxmlformats.org/drawingml/2006/main">
               <a:ext uri="{FF2B5EF4-FFF2-40B4-BE49-F238E27FC236}">
-                <a16:creationId xmlns:a16="http://schemas.microsoft.com/office/drawing/2014/main" id="{4BBC9724-E1F2-4AC7-A24D-9685A473C58E}"/>
+                <a16:creationId xmlns:a16="http://schemas.microsoft.com/office/drawing/2014/main" id="{FE07A5F2-F9A6-481C-8E97-E4DA967F8AC8}"/>
               </a:ext>
             </a:extLst>
           </p:cNvPr>
@@ -3730,7 +3730,7 @@
           <p:cNvPr id="10" name="">
             <a:extLst xmlns:a="http://schemas.openxmlformats.org/drawingml/2006/main">
               <a:ext uri="{FF2B5EF4-FFF2-40B4-BE49-F238E27FC236}">
-                <a16:creationId xmlns:a16="http://schemas.microsoft.com/office/drawing/2014/main" id="{218D8282-9D17-490C-9786-537C1D4551E4}"/>
+                <a16:creationId xmlns:a16="http://schemas.microsoft.com/office/drawing/2014/main" id="{DB500A1D-351F-411E-B1D9-32D17649A444}"/>
               </a:ext>
             </a:extLst>
           </p:cNvPr>
@@ -3787,7 +3787,7 @@
           <p:cNvPr id="11" name="">
             <a:extLst xmlns:a="http://schemas.openxmlformats.org/drawingml/2006/main">
               <a:ext uri="{FF2B5EF4-FFF2-40B4-BE49-F238E27FC236}">
-                <a16:creationId xmlns:a16="http://schemas.microsoft.com/office/drawing/2014/main" id="{675D64EC-4EF1-41D4-A8F3-C81A6D06FD88}"/>
+                <a16:creationId xmlns:a16="http://schemas.microsoft.com/office/drawing/2014/main" id="{CEFDEF7F-57C7-486D-AB7A-32A31F948553}"/>
               </a:ext>
             </a:extLst>
           </p:cNvPr>
@@ -3821,7 +3821,7 @@
           <p:cNvPr id="12" name="">
             <a:extLst xmlns:a="http://schemas.openxmlformats.org/drawingml/2006/main">
               <a:ext uri="{FF2B5EF4-FFF2-40B4-BE49-F238E27FC236}">
-                <a16:creationId xmlns:a16="http://schemas.microsoft.com/office/drawing/2014/main" id="{D04DEE06-50E5-4852-8792-3F79170851C9}"/>
+                <a16:creationId xmlns:a16="http://schemas.microsoft.com/office/drawing/2014/main" id="{BE1AD227-AA23-4D68-82AF-F59C16AC099F}"/>
               </a:ext>
             </a:extLst>
           </p:cNvPr>
@@ -3878,7 +3878,7 @@
           <p:cNvPr id="13" name="">
             <a:extLst xmlns:a="http://schemas.openxmlformats.org/drawingml/2006/main">
               <a:ext uri="{FF2B5EF4-FFF2-40B4-BE49-F238E27FC236}">
-                <a16:creationId xmlns:a16="http://schemas.microsoft.com/office/drawing/2014/main" id="{6DF3E968-2864-4293-A78E-AAF55FBB2AA8}"/>
+                <a16:creationId xmlns:a16="http://schemas.microsoft.com/office/drawing/2014/main" id="{33E366E0-FA06-419F-B31E-2CFC64820BE9}"/>
               </a:ext>
             </a:extLst>
           </p:cNvPr>
@@ -3935,7 +3935,7 @@
           <p:cNvPr id="14" name="">
             <a:extLst xmlns:a="http://schemas.openxmlformats.org/drawingml/2006/main">
               <a:ext uri="{FF2B5EF4-FFF2-40B4-BE49-F238E27FC236}">
-                <a16:creationId xmlns:a16="http://schemas.microsoft.com/office/drawing/2014/main" id="{A11E4C66-45BA-457A-B063-EB85C9E6AD0B}"/>
+                <a16:creationId xmlns:a16="http://schemas.microsoft.com/office/drawing/2014/main" id="{1DA5A077-83BD-459F-88DE-824BD3B320B9}"/>
               </a:ext>
             </a:extLst>
           </p:cNvPr>
@@ -3992,7 +3992,7 @@
           <p:cNvPr id="15" name="">
             <a:extLst xmlns:a="http://schemas.openxmlformats.org/drawingml/2006/main">
               <a:ext uri="{FF2B5EF4-FFF2-40B4-BE49-F238E27FC236}">
-                <a16:creationId xmlns:a16="http://schemas.microsoft.com/office/drawing/2014/main" id="{DC9BFCC1-A4B6-472C-9568-D05C1BC3E488}"/>
+                <a16:creationId xmlns:a16="http://schemas.microsoft.com/office/drawing/2014/main" id="{C664BF35-C622-4F81-A3DF-7E254C3BEEFC}"/>
               </a:ext>
             </a:extLst>
           </p:cNvPr>
@@ -4026,7 +4026,7 @@
           <p:cNvPr id="16" name="">
             <a:extLst xmlns:a="http://schemas.openxmlformats.org/drawingml/2006/main">
               <a:ext uri="{FF2B5EF4-FFF2-40B4-BE49-F238E27FC236}">
-                <a16:creationId xmlns:a16="http://schemas.microsoft.com/office/drawing/2014/main" id="{F30C89C3-92D9-4EFB-8ACD-777EE1D05C48}"/>
+                <a16:creationId xmlns:a16="http://schemas.microsoft.com/office/drawing/2014/main" id="{092AA9E2-E180-4B29-9732-61152C448194}"/>
               </a:ext>
             </a:extLst>
           </p:cNvPr>
@@ -4083,7 +4083,7 @@
           <p:cNvPr id="17" name="">
             <a:extLst xmlns:a="http://schemas.openxmlformats.org/drawingml/2006/main">
               <a:ext uri="{FF2B5EF4-FFF2-40B4-BE49-F238E27FC236}">
-                <a16:creationId xmlns:a16="http://schemas.microsoft.com/office/drawing/2014/main" id="{5ECF4A96-EFA7-44DE-8475-A57755D2562E}"/>
+                <a16:creationId xmlns:a16="http://schemas.microsoft.com/office/drawing/2014/main" id="{6B7006F5-9B70-4303-A1ED-E581769608FB}"/>
               </a:ext>
             </a:extLst>
           </p:cNvPr>
@@ -4140,7 +4140,7 @@
           <p:cNvPr id="18" name="">
             <a:extLst xmlns:a="http://schemas.openxmlformats.org/drawingml/2006/main">
               <a:ext uri="{FF2B5EF4-FFF2-40B4-BE49-F238E27FC236}">
-                <a16:creationId xmlns:a16="http://schemas.microsoft.com/office/drawing/2014/main" id="{0B9D40F3-3B54-4371-B686-877806F4C728}"/>
+                <a16:creationId xmlns:a16="http://schemas.microsoft.com/office/drawing/2014/main" id="{285F80EC-8F60-41F8-8551-30E4AB67EE8F}"/>
               </a:ext>
             </a:extLst>
           </p:cNvPr>
@@ -4195,7 +4195,7 @@
     </p:spTree>
     <p:extLst>
       <p:ext uri="{BB962C8B-B14F-4D97-AF65-F5344CB8AC3E}">
-        <p14:creationId xmlns:p14="http://schemas.microsoft.com/office/powerpoint/2010/main" val="230720768"/>
+        <p14:creationId xmlns:p14="http://schemas.microsoft.com/office/powerpoint/2010/main" val="474797207"/>
       </p:ext>
     </p:extLst>
   </p:cSld>
@@ -4350,7 +4350,7 @@
           <p:cNvPr id="23" name="">
             <a:extLst xmlns:a="http://schemas.openxmlformats.org/drawingml/2006/main">
               <a:ext uri="{FF2B5EF4-FFF2-40B4-BE49-F238E27FC236}">
-                <a16:creationId xmlns:a16="http://schemas.microsoft.com/office/drawing/2014/main" id="{871B8E8D-9C65-4929-97A0-CB4EA1455672}"/>
+                <a16:creationId xmlns:a16="http://schemas.microsoft.com/office/drawing/2014/main" id="{DCEDB18F-4A1C-4300-9DAE-BA3D42965EA1}"/>
               </a:ext>
             </a:extLst>
           </p:cNvPr>
@@ -4382,7 +4382,7 @@
           <p:cNvPr id="2" name="">
             <a:extLst xmlns:a="http://schemas.openxmlformats.org/drawingml/2006/main">
               <a:ext uri="{FF2B5EF4-FFF2-40B4-BE49-F238E27FC236}">
-                <a16:creationId xmlns:a16="http://schemas.microsoft.com/office/drawing/2014/main" id="{9A5BF408-3970-4FDA-B2EA-042955A2A385}"/>
+                <a16:creationId xmlns:a16="http://schemas.microsoft.com/office/drawing/2014/main" id="{3E4BD560-2C8C-4041-94CE-30FC6F3D26A4}"/>
               </a:ext>
             </a:extLst>
           </p:cNvPr>
@@ -4439,7 +4439,7 @@
           <p:cNvPr id="3" name="">
             <a:extLst xmlns:a="http://schemas.openxmlformats.org/drawingml/2006/main">
               <a:ext uri="{FF2B5EF4-FFF2-40B4-BE49-F238E27FC236}">
-                <a16:creationId xmlns:a16="http://schemas.microsoft.com/office/drawing/2014/main" id="{40E5037C-8A3F-477B-BA8E-3EEEEF42E543}"/>
+                <a16:creationId xmlns:a16="http://schemas.microsoft.com/office/drawing/2014/main" id="{F0134434-6C80-4B39-B8F2-8765D21CA474}"/>
               </a:ext>
             </a:extLst>
           </p:cNvPr>
@@ -4471,7 +4471,7 @@
           <p:cNvPr id="4" name="">
             <a:extLst xmlns:a="http://schemas.openxmlformats.org/drawingml/2006/main">
               <a:ext uri="{FF2B5EF4-FFF2-40B4-BE49-F238E27FC236}">
-                <a16:creationId xmlns:a16="http://schemas.microsoft.com/office/drawing/2014/main" id="{3131FB38-4246-4766-A22B-123E3126BC40}"/>
+                <a16:creationId xmlns:a16="http://schemas.microsoft.com/office/drawing/2014/main" id="{8AC859CC-814F-44A1-979D-2D83031AD725}"/>
               </a:ext>
             </a:extLst>
           </p:cNvPr>
@@ -4528,7 +4528,7 @@
           <p:cNvPr id="5" name="">
             <a:extLst xmlns:a="http://schemas.openxmlformats.org/drawingml/2006/main">
               <a:ext uri="{FF2B5EF4-FFF2-40B4-BE49-F238E27FC236}">
-                <a16:creationId xmlns:a16="http://schemas.microsoft.com/office/drawing/2014/main" id="{4CED2556-C2DB-40BB-8092-078F142A59CF}"/>
+                <a16:creationId xmlns:a16="http://schemas.microsoft.com/office/drawing/2014/main" id="{6697C4C1-5A09-4686-8E13-206A0F0DD8BD}"/>
               </a:ext>
             </a:extLst>
           </p:cNvPr>
@@ -4585,7 +4585,7 @@
           <p:cNvPr id="6" name="">
             <a:extLst xmlns:a="http://schemas.openxmlformats.org/drawingml/2006/main">
               <a:ext uri="{FF2B5EF4-FFF2-40B4-BE49-F238E27FC236}">
-                <a16:creationId xmlns:a16="http://schemas.microsoft.com/office/drawing/2014/main" id="{B13AB9AA-32CD-4CAC-970E-D608787AE0A8}"/>
+                <a16:creationId xmlns:a16="http://schemas.microsoft.com/office/drawing/2014/main" id="{A5D849B6-3A9D-402C-8197-A506940D1FFB}"/>
               </a:ext>
             </a:extLst>
           </p:cNvPr>
@@ -4642,7 +4642,7 @@
           <p:cNvPr id="7" name="">
             <a:extLst xmlns:a="http://schemas.openxmlformats.org/drawingml/2006/main">
               <a:ext uri="{FF2B5EF4-FFF2-40B4-BE49-F238E27FC236}">
-                <a16:creationId xmlns:a16="http://schemas.microsoft.com/office/drawing/2014/main" id="{6AF1FC83-1D94-42C0-A5D2-949A828F2F81}"/>
+                <a16:creationId xmlns:a16="http://schemas.microsoft.com/office/drawing/2014/main" id="{0843705D-C39C-4497-A6A5-AF952A8E93D6}"/>
               </a:ext>
             </a:extLst>
           </p:cNvPr>
@@ -4674,7 +4674,7 @@
           <p:cNvPr id="8" name="">
             <a:extLst xmlns:a="http://schemas.openxmlformats.org/drawingml/2006/main">
               <a:ext uri="{FF2B5EF4-FFF2-40B4-BE49-F238E27FC236}">
-                <a16:creationId xmlns:a16="http://schemas.microsoft.com/office/drawing/2014/main" id="{A327A211-9F95-4E9A-A4F9-C54D2E2BB7C0}"/>
+                <a16:creationId xmlns:a16="http://schemas.microsoft.com/office/drawing/2014/main" id="{277C13CC-E892-4B3D-800A-32E207665BF7}"/>
               </a:ext>
             </a:extLst>
           </p:cNvPr>
@@ -4731,7 +4731,7 @@
           <p:cNvPr id="9" name="">
             <a:extLst xmlns:a="http://schemas.openxmlformats.org/drawingml/2006/main">
               <a:ext uri="{FF2B5EF4-FFF2-40B4-BE49-F238E27FC236}">
-                <a16:creationId xmlns:a16="http://schemas.microsoft.com/office/drawing/2014/main" id="{7B473A6A-6F3B-43EC-966E-FBA46951ECF6}"/>
+                <a16:creationId xmlns:a16="http://schemas.microsoft.com/office/drawing/2014/main" id="{4187C318-BF31-45DF-8750-64D8D192E917}"/>
               </a:ext>
             </a:extLst>
           </p:cNvPr>
@@ -4788,7 +4788,7 @@
           <p:cNvPr id="10" name="">
             <a:extLst xmlns:a="http://schemas.openxmlformats.org/drawingml/2006/main">
               <a:ext uri="{FF2B5EF4-FFF2-40B4-BE49-F238E27FC236}">
-                <a16:creationId xmlns:a16="http://schemas.microsoft.com/office/drawing/2014/main" id="{F31057EB-F933-4E2C-B1D8-34400F022201}"/>
+                <a16:creationId xmlns:a16="http://schemas.microsoft.com/office/drawing/2014/main" id="{A61A8452-BDB6-479E-B52C-FCA243C570E2}"/>
               </a:ext>
             </a:extLst>
           </p:cNvPr>
@@ -4822,7 +4822,7 @@
           <p:cNvPr id="11" name="">
             <a:extLst xmlns:a="http://schemas.openxmlformats.org/drawingml/2006/main">
               <a:ext uri="{FF2B5EF4-FFF2-40B4-BE49-F238E27FC236}">
-                <a16:creationId xmlns:a16="http://schemas.microsoft.com/office/drawing/2014/main" id="{FC5E85F6-6E2B-4910-8A8F-82B2D9C4028C}"/>
+                <a16:creationId xmlns:a16="http://schemas.microsoft.com/office/drawing/2014/main" id="{58ED3240-E537-4D91-AF6F-F4FF08E1B6DD}"/>
               </a:ext>
             </a:extLst>
           </p:cNvPr>
@@ -4854,7 +4854,7 @@
           <p:cNvPr id="12" name="">
             <a:extLst xmlns:a="http://schemas.openxmlformats.org/drawingml/2006/main">
               <a:ext uri="{FF2B5EF4-FFF2-40B4-BE49-F238E27FC236}">
-                <a16:creationId xmlns:a16="http://schemas.microsoft.com/office/drawing/2014/main" id="{B0FC41D8-D2C4-4528-94D6-84EC0615A28E}"/>
+                <a16:creationId xmlns:a16="http://schemas.microsoft.com/office/drawing/2014/main" id="{4062E369-F7F2-44EF-8505-4355D0804B79}"/>
               </a:ext>
             </a:extLst>
           </p:cNvPr>
@@ -4911,7 +4911,7 @@
           <p:cNvPr id="13" name="">
             <a:extLst xmlns:a="http://schemas.openxmlformats.org/drawingml/2006/main">
               <a:ext uri="{FF2B5EF4-FFF2-40B4-BE49-F238E27FC236}">
-                <a16:creationId xmlns:a16="http://schemas.microsoft.com/office/drawing/2014/main" id="{2955A6BB-CB55-4F42-B2C8-13671B9D1990}"/>
+                <a16:creationId xmlns:a16="http://schemas.microsoft.com/office/drawing/2014/main" id="{EDF76DF9-029B-48FC-8EB9-265BE66B1753}"/>
               </a:ext>
             </a:extLst>
           </p:cNvPr>
@@ -4968,7 +4968,7 @@
           <p:cNvPr id="14" name="">
             <a:extLst xmlns:a="http://schemas.openxmlformats.org/drawingml/2006/main">
               <a:ext uri="{FF2B5EF4-FFF2-40B4-BE49-F238E27FC236}">
-                <a16:creationId xmlns:a16="http://schemas.microsoft.com/office/drawing/2014/main" id="{7C5E4924-DD3A-4897-B514-507A65A07262}"/>
+                <a16:creationId xmlns:a16="http://schemas.microsoft.com/office/drawing/2014/main" id="{FFEF837F-CD31-4C8C-8D5D-323CB7BA1A81}"/>
               </a:ext>
             </a:extLst>
           </p:cNvPr>
@@ -5002,7 +5002,7 @@
           <p:cNvPr id="15" name="">
             <a:extLst xmlns:a="http://schemas.openxmlformats.org/drawingml/2006/main">
               <a:ext uri="{FF2B5EF4-FFF2-40B4-BE49-F238E27FC236}">
-                <a16:creationId xmlns:a16="http://schemas.microsoft.com/office/drawing/2014/main" id="{BF5A20D6-AB73-4C10-A562-8628283D78E0}"/>
+                <a16:creationId xmlns:a16="http://schemas.microsoft.com/office/drawing/2014/main" id="{76D3EF80-4F03-42CA-869A-E64CCE5333A9}"/>
               </a:ext>
             </a:extLst>
           </p:cNvPr>
@@ -5034,7 +5034,7 @@
           <p:cNvPr id="16" name="">
             <a:extLst xmlns:a="http://schemas.openxmlformats.org/drawingml/2006/main">
               <a:ext uri="{FF2B5EF4-FFF2-40B4-BE49-F238E27FC236}">
-                <a16:creationId xmlns:a16="http://schemas.microsoft.com/office/drawing/2014/main" id="{11CD2AB0-3646-41FB-9D7D-6FC908EFC420}"/>
+                <a16:creationId xmlns:a16="http://schemas.microsoft.com/office/drawing/2014/main" id="{223BE2E9-CDFE-49E4-8BB8-F812E7F82836}"/>
               </a:ext>
             </a:extLst>
           </p:cNvPr>
@@ -5091,7 +5091,7 @@
           <p:cNvPr id="17" name="">
             <a:extLst xmlns:a="http://schemas.openxmlformats.org/drawingml/2006/main">
               <a:ext uri="{FF2B5EF4-FFF2-40B4-BE49-F238E27FC236}">
-                <a16:creationId xmlns:a16="http://schemas.microsoft.com/office/drawing/2014/main" id="{A3AE54CB-312C-447B-A47F-C8F8509BD1C4}"/>
+                <a16:creationId xmlns:a16="http://schemas.microsoft.com/office/drawing/2014/main" id="{96234DC0-7FCB-4F4F-A6AF-1D9390DE602F}"/>
               </a:ext>
             </a:extLst>
           </p:cNvPr>
@@ -5148,7 +5148,7 @@
           <p:cNvPr id="18" name="">
             <a:extLst xmlns:a="http://schemas.openxmlformats.org/drawingml/2006/main">
               <a:ext uri="{FF2B5EF4-FFF2-40B4-BE49-F238E27FC236}">
-                <a16:creationId xmlns:a16="http://schemas.microsoft.com/office/drawing/2014/main" id="{54EF8D91-7E64-4603-AA9F-3F248A695A64}"/>
+                <a16:creationId xmlns:a16="http://schemas.microsoft.com/office/drawing/2014/main" id="{2B71395A-9085-4DCA-8CC1-B6720EC207BB}"/>
               </a:ext>
             </a:extLst>
           </p:cNvPr>
@@ -5182,7 +5182,7 @@
           <p:cNvPr id="19" name="">
             <a:extLst xmlns:a="http://schemas.openxmlformats.org/drawingml/2006/main">
               <a:ext uri="{FF2B5EF4-FFF2-40B4-BE49-F238E27FC236}">
-                <a16:creationId xmlns:a16="http://schemas.microsoft.com/office/drawing/2014/main" id="{FF53F9D3-08C2-4FD6-87BA-013A141827DA}"/>
+                <a16:creationId xmlns:a16="http://schemas.microsoft.com/office/drawing/2014/main" id="{34B523FA-AE2C-4FB0-8A00-026AF7FAABD6}"/>
               </a:ext>
             </a:extLst>
           </p:cNvPr>
@@ -5214,7 +5214,7 @@
           <p:cNvPr id="20" name="">
             <a:extLst xmlns:a="http://schemas.openxmlformats.org/drawingml/2006/main">
               <a:ext uri="{FF2B5EF4-FFF2-40B4-BE49-F238E27FC236}">
-                <a16:creationId xmlns:a16="http://schemas.microsoft.com/office/drawing/2014/main" id="{5CF260F3-E566-4F43-B67F-DC47F074821F}"/>
+                <a16:creationId xmlns:a16="http://schemas.microsoft.com/office/drawing/2014/main" id="{B509DC90-D6C5-4BED-B07B-11B598886AB0}"/>
               </a:ext>
             </a:extLst>
           </p:cNvPr>
@@ -5271,7 +5271,7 @@
           <p:cNvPr id="21" name="">
             <a:extLst xmlns:a="http://schemas.openxmlformats.org/drawingml/2006/main">
               <a:ext uri="{FF2B5EF4-FFF2-40B4-BE49-F238E27FC236}">
-                <a16:creationId xmlns:a16="http://schemas.microsoft.com/office/drawing/2014/main" id="{9D5D46AB-C672-4076-8A86-DE36D351B45C}"/>
+                <a16:creationId xmlns:a16="http://schemas.microsoft.com/office/drawing/2014/main" id="{070124D4-0BE4-4C84-A01E-B0EC1C82BFEF}"/>
               </a:ext>
             </a:extLst>
           </p:cNvPr>
@@ -5328,7 +5328,7 @@
           <p:cNvPr id="22" name="">
             <a:extLst xmlns:a="http://schemas.openxmlformats.org/drawingml/2006/main">
               <a:ext uri="{FF2B5EF4-FFF2-40B4-BE49-F238E27FC236}">
-                <a16:creationId xmlns:a16="http://schemas.microsoft.com/office/drawing/2014/main" id="{D59746A6-E10D-413E-84EE-9917F491ECDC}"/>
+                <a16:creationId xmlns:a16="http://schemas.microsoft.com/office/drawing/2014/main" id="{B0B741D4-2BC3-4F79-A1BC-23EFE587B997}"/>
               </a:ext>
             </a:extLst>
           </p:cNvPr>
@@ -5383,7 +5383,7 @@
     </p:spTree>
     <p:extLst>
       <p:ext uri="{BB962C8B-B14F-4D97-AF65-F5344CB8AC3E}">
-        <p14:creationId xmlns:p14="http://schemas.microsoft.com/office/powerpoint/2010/main" val="926901439"/>
+        <p14:creationId xmlns:p14="http://schemas.microsoft.com/office/powerpoint/2010/main" val="1789161114"/>
       </p:ext>
     </p:extLst>
   </p:cSld>
@@ -5584,7 +5584,7 @@
           <p:cNvPr id="23" name="">
             <a:extLst xmlns:a="http://schemas.openxmlformats.org/drawingml/2006/main">
               <a:ext uri="{FF2B5EF4-FFF2-40B4-BE49-F238E27FC236}">
-                <a16:creationId xmlns:a16="http://schemas.microsoft.com/office/drawing/2014/main" id="{33FEAB44-8331-43B0-B24B-E696D022154F}"/>
+                <a16:creationId xmlns:a16="http://schemas.microsoft.com/office/drawing/2014/main" id="{F0C1932D-DFDB-4F95-8CAB-F55DBE50CE72}"/>
               </a:ext>
             </a:extLst>
           </p:cNvPr>
@@ -5616,7 +5616,7 @@
           <p:cNvPr id="2" name="">
             <a:extLst xmlns:a="http://schemas.openxmlformats.org/drawingml/2006/main">
               <a:ext uri="{FF2B5EF4-FFF2-40B4-BE49-F238E27FC236}">
-                <a16:creationId xmlns:a16="http://schemas.microsoft.com/office/drawing/2014/main" id="{A92A87B3-8C08-4A6F-BC98-D6BDC609B543}"/>
+                <a16:creationId xmlns:a16="http://schemas.microsoft.com/office/drawing/2014/main" id="{EF2E8B2E-D37D-4EF4-BC69-1F61C639AEF4}"/>
               </a:ext>
             </a:extLst>
           </p:cNvPr>
@@ -5673,7 +5673,7 @@
           <p:cNvPr id="3" name="">
             <a:extLst xmlns:a="http://schemas.openxmlformats.org/drawingml/2006/main">
               <a:ext uri="{FF2B5EF4-FFF2-40B4-BE49-F238E27FC236}">
-                <a16:creationId xmlns:a16="http://schemas.microsoft.com/office/drawing/2014/main" id="{57F0F65A-7460-43BB-8B7D-A87F17E59DE5}"/>
+                <a16:creationId xmlns:a16="http://schemas.microsoft.com/office/drawing/2014/main" id="{1E0C5D8F-9E06-45B4-9674-66B5058E6767}"/>
               </a:ext>
             </a:extLst>
           </p:cNvPr>
@@ -5705,7 +5705,7 @@
           <p:cNvPr id="4" name="">
             <a:extLst xmlns:a="http://schemas.openxmlformats.org/drawingml/2006/main">
               <a:ext uri="{FF2B5EF4-FFF2-40B4-BE49-F238E27FC236}">
-                <a16:creationId xmlns:a16="http://schemas.microsoft.com/office/drawing/2014/main" id="{115B058D-8F61-44AB-82DF-BAA472B29FB4}"/>
+                <a16:creationId xmlns:a16="http://schemas.microsoft.com/office/drawing/2014/main" id="{EF34663D-33EF-478B-B830-3E1867613518}"/>
               </a:ext>
             </a:extLst>
           </p:cNvPr>
@@ -5762,7 +5762,7 @@
           <p:cNvPr id="5" name="">
             <a:extLst xmlns:a="http://schemas.openxmlformats.org/drawingml/2006/main">
               <a:ext uri="{FF2B5EF4-FFF2-40B4-BE49-F238E27FC236}">
-                <a16:creationId xmlns:a16="http://schemas.microsoft.com/office/drawing/2014/main" id="{42A29C84-7149-42ED-ABB9-90352121732B}"/>
+                <a16:creationId xmlns:a16="http://schemas.microsoft.com/office/drawing/2014/main" id="{B6DF5178-E014-48D2-95F4-792F8F89265B}"/>
               </a:ext>
             </a:extLst>
           </p:cNvPr>
@@ -5819,7 +5819,7 @@
           <p:cNvPr id="6" name="">
             <a:extLst xmlns:a="http://schemas.openxmlformats.org/drawingml/2006/main">
               <a:ext uri="{FF2B5EF4-FFF2-40B4-BE49-F238E27FC236}">
-                <a16:creationId xmlns:a16="http://schemas.microsoft.com/office/drawing/2014/main" id="{1A46DF84-6669-4B09-BE54-59602485AF32}"/>
+                <a16:creationId xmlns:a16="http://schemas.microsoft.com/office/drawing/2014/main" id="{25D81960-EEFC-4B3D-B536-35CE65F905A2}"/>
               </a:ext>
             </a:extLst>
           </p:cNvPr>
@@ -5876,7 +5876,7 @@
           <p:cNvPr id="7" name="">
             <a:extLst xmlns:a="http://schemas.openxmlformats.org/drawingml/2006/main">
               <a:ext uri="{FF2B5EF4-FFF2-40B4-BE49-F238E27FC236}">
-                <a16:creationId xmlns:a16="http://schemas.microsoft.com/office/drawing/2014/main" id="{6F50B6CC-A874-4646-B954-B2A99131507D}"/>
+                <a16:creationId xmlns:a16="http://schemas.microsoft.com/office/drawing/2014/main" id="{3B2E13C1-2EB6-4914-9EB2-A1189C2CC0C2}"/>
               </a:ext>
             </a:extLst>
           </p:cNvPr>
@@ -5908,7 +5908,7 @@
           <p:cNvPr id="8" name="">
             <a:extLst xmlns:a="http://schemas.openxmlformats.org/drawingml/2006/main">
               <a:ext uri="{FF2B5EF4-FFF2-40B4-BE49-F238E27FC236}">
-                <a16:creationId xmlns:a16="http://schemas.microsoft.com/office/drawing/2014/main" id="{F18F8F4E-31C6-4FA2-8C97-EE94F5515B8D}"/>
+                <a16:creationId xmlns:a16="http://schemas.microsoft.com/office/drawing/2014/main" id="{9EA1DEE9-8515-4E5D-A22D-9618B7767813}"/>
               </a:ext>
             </a:extLst>
           </p:cNvPr>
@@ -5965,7 +5965,7 @@
           <p:cNvPr id="9" name="">
             <a:extLst xmlns:a="http://schemas.openxmlformats.org/drawingml/2006/main">
               <a:ext uri="{FF2B5EF4-FFF2-40B4-BE49-F238E27FC236}">
-                <a16:creationId xmlns:a16="http://schemas.microsoft.com/office/drawing/2014/main" id="{EC226A89-A8CC-4D89-8F7F-98609067C13F}"/>
+                <a16:creationId xmlns:a16="http://schemas.microsoft.com/office/drawing/2014/main" id="{DE9E7501-DC5F-44C7-8103-AF3D6DAFEEBD}"/>
               </a:ext>
             </a:extLst>
           </p:cNvPr>
@@ -6022,7 +6022,7 @@
           <p:cNvPr id="10" name="">
             <a:extLst xmlns:a="http://schemas.openxmlformats.org/drawingml/2006/main">
               <a:ext uri="{FF2B5EF4-FFF2-40B4-BE49-F238E27FC236}">
-                <a16:creationId xmlns:a16="http://schemas.microsoft.com/office/drawing/2014/main" id="{85C9760C-1D1D-4AEC-B3C2-A1B542EA7E99}"/>
+                <a16:creationId xmlns:a16="http://schemas.microsoft.com/office/drawing/2014/main" id="{DF80D7AA-6E52-4419-824B-EBBA473552C8}"/>
               </a:ext>
             </a:extLst>
           </p:cNvPr>
@@ -6056,7 +6056,7 @@
           <p:cNvPr id="11" name="">
             <a:extLst xmlns:a="http://schemas.openxmlformats.org/drawingml/2006/main">
               <a:ext uri="{FF2B5EF4-FFF2-40B4-BE49-F238E27FC236}">
-                <a16:creationId xmlns:a16="http://schemas.microsoft.com/office/drawing/2014/main" id="{8D2A51F8-5217-4311-A2A3-E97CCB6EC546}"/>
+                <a16:creationId xmlns:a16="http://schemas.microsoft.com/office/drawing/2014/main" id="{79C9181D-BCCF-46B7-9498-CCC73E799EF7}"/>
               </a:ext>
             </a:extLst>
           </p:cNvPr>
@@ -6088,7 +6088,7 @@
           <p:cNvPr id="12" name="">
             <a:extLst xmlns:a="http://schemas.openxmlformats.org/drawingml/2006/main">
               <a:ext uri="{FF2B5EF4-FFF2-40B4-BE49-F238E27FC236}">
-                <a16:creationId xmlns:a16="http://schemas.microsoft.com/office/drawing/2014/main" id="{3B52C7D0-6224-4EC6-8985-AE892F168D67}"/>
+                <a16:creationId xmlns:a16="http://schemas.microsoft.com/office/drawing/2014/main" id="{0FEDAE33-05D2-4848-9F21-69AC6F2757EB}"/>
               </a:ext>
             </a:extLst>
           </p:cNvPr>
@@ -6145,7 +6145,7 @@
           <p:cNvPr id="13" name="">
             <a:extLst xmlns:a="http://schemas.openxmlformats.org/drawingml/2006/main">
               <a:ext uri="{FF2B5EF4-FFF2-40B4-BE49-F238E27FC236}">
-                <a16:creationId xmlns:a16="http://schemas.microsoft.com/office/drawing/2014/main" id="{FC57F335-3575-4956-88B9-5C2E0CB646F0}"/>
+                <a16:creationId xmlns:a16="http://schemas.microsoft.com/office/drawing/2014/main" id="{BF8A8F79-FCAA-4074-A67D-1082DCC6A0E6}"/>
               </a:ext>
             </a:extLst>
           </p:cNvPr>
@@ -6202,7 +6202,7 @@
           <p:cNvPr id="14" name="">
             <a:extLst xmlns:a="http://schemas.openxmlformats.org/drawingml/2006/main">
               <a:ext uri="{FF2B5EF4-FFF2-40B4-BE49-F238E27FC236}">
-                <a16:creationId xmlns:a16="http://schemas.microsoft.com/office/drawing/2014/main" id="{977E78E8-8A00-4F4B-8EC5-3AC2145F3037}"/>
+                <a16:creationId xmlns:a16="http://schemas.microsoft.com/office/drawing/2014/main" id="{71D81AD2-51AB-4BD1-9FA8-16EA552DB53D}"/>
               </a:ext>
             </a:extLst>
           </p:cNvPr>
@@ -6236,7 +6236,7 @@
           <p:cNvPr id="15" name="">
             <a:extLst xmlns:a="http://schemas.openxmlformats.org/drawingml/2006/main">
               <a:ext uri="{FF2B5EF4-FFF2-40B4-BE49-F238E27FC236}">
-                <a16:creationId xmlns:a16="http://schemas.microsoft.com/office/drawing/2014/main" id="{E08D7D75-5360-4D1C-96B3-C98866A01A96}"/>
+                <a16:creationId xmlns:a16="http://schemas.microsoft.com/office/drawing/2014/main" id="{8D23E666-CA79-48E1-9FDB-156D02432C26}"/>
               </a:ext>
             </a:extLst>
           </p:cNvPr>
@@ -6268,7 +6268,7 @@
           <p:cNvPr id="16" name="">
             <a:extLst xmlns:a="http://schemas.openxmlformats.org/drawingml/2006/main">
               <a:ext uri="{FF2B5EF4-FFF2-40B4-BE49-F238E27FC236}">
-                <a16:creationId xmlns:a16="http://schemas.microsoft.com/office/drawing/2014/main" id="{8FBD4F75-84D7-4B53-8C1E-435F8D00459A}"/>
+                <a16:creationId xmlns:a16="http://schemas.microsoft.com/office/drawing/2014/main" id="{584E43FE-8ACD-46E7-95B1-1B64F2A7347F}"/>
               </a:ext>
             </a:extLst>
           </p:cNvPr>
@@ -6325,7 +6325,7 @@
           <p:cNvPr id="17" name="">
             <a:extLst xmlns:a="http://schemas.openxmlformats.org/drawingml/2006/main">
               <a:ext uri="{FF2B5EF4-FFF2-40B4-BE49-F238E27FC236}">
-                <a16:creationId xmlns:a16="http://schemas.microsoft.com/office/drawing/2014/main" id="{67F8F41E-B2BF-467A-AD69-E58ECD78A07B}"/>
+                <a16:creationId xmlns:a16="http://schemas.microsoft.com/office/drawing/2014/main" id="{E4E213ED-D713-4854-A6FA-A82003176032}"/>
               </a:ext>
             </a:extLst>
           </p:cNvPr>
@@ -6382,7 +6382,7 @@
           <p:cNvPr id="18" name="">
             <a:extLst xmlns:a="http://schemas.openxmlformats.org/drawingml/2006/main">
               <a:ext uri="{FF2B5EF4-FFF2-40B4-BE49-F238E27FC236}">
-                <a16:creationId xmlns:a16="http://schemas.microsoft.com/office/drawing/2014/main" id="{D856B8A8-773A-4C5D-B054-89F40893E0B5}"/>
+                <a16:creationId xmlns:a16="http://schemas.microsoft.com/office/drawing/2014/main" id="{87ABFCFF-7797-4C26-883E-DA41748AAB36}"/>
               </a:ext>
             </a:extLst>
           </p:cNvPr>
@@ -6416,7 +6416,7 @@
           <p:cNvPr id="19" name="">
             <a:extLst xmlns:a="http://schemas.openxmlformats.org/drawingml/2006/main">
               <a:ext uri="{FF2B5EF4-FFF2-40B4-BE49-F238E27FC236}">
-                <a16:creationId xmlns:a16="http://schemas.microsoft.com/office/drawing/2014/main" id="{70DE17E1-CE3C-4D67-9A39-A3DCDB7DD75E}"/>
+                <a16:creationId xmlns:a16="http://schemas.microsoft.com/office/drawing/2014/main" id="{0952C570-5CBC-4572-BD50-3F32A1DAFC56}"/>
               </a:ext>
             </a:extLst>
           </p:cNvPr>
@@ -6448,7 +6448,7 @@
           <p:cNvPr id="20" name="">
             <a:extLst xmlns:a="http://schemas.openxmlformats.org/drawingml/2006/main">
               <a:ext uri="{FF2B5EF4-FFF2-40B4-BE49-F238E27FC236}">
-                <a16:creationId xmlns:a16="http://schemas.microsoft.com/office/drawing/2014/main" id="{9C310E37-9ACE-4C94-9AE2-07DDD7984A81}"/>
+                <a16:creationId xmlns:a16="http://schemas.microsoft.com/office/drawing/2014/main" id="{0A06FBBD-B908-4D4E-97AA-A35319C6C53D}"/>
               </a:ext>
             </a:extLst>
           </p:cNvPr>
@@ -6505,7 +6505,7 @@
           <p:cNvPr id="21" name="">
             <a:extLst xmlns:a="http://schemas.openxmlformats.org/drawingml/2006/main">
               <a:ext uri="{FF2B5EF4-FFF2-40B4-BE49-F238E27FC236}">
-                <a16:creationId xmlns:a16="http://schemas.microsoft.com/office/drawing/2014/main" id="{34C1FD9A-054D-46CA-9ED4-78FD858221AA}"/>
+                <a16:creationId xmlns:a16="http://schemas.microsoft.com/office/drawing/2014/main" id="{D39F6EA1-8BC9-44DC-9C34-D97ADED14321}"/>
               </a:ext>
             </a:extLst>
           </p:cNvPr>
@@ -6562,7 +6562,7 @@
           <p:cNvPr id="22" name="">
             <a:extLst xmlns:a="http://schemas.openxmlformats.org/drawingml/2006/main">
               <a:ext uri="{FF2B5EF4-FFF2-40B4-BE49-F238E27FC236}">
-                <a16:creationId xmlns:a16="http://schemas.microsoft.com/office/drawing/2014/main" id="{ABC9E656-75B4-4321-8816-3F48DCE0E7DC}"/>
+                <a16:creationId xmlns:a16="http://schemas.microsoft.com/office/drawing/2014/main" id="{4088AA07-45A3-4EEF-97C2-5EBE1D0DDBA4}"/>
               </a:ext>
             </a:extLst>
           </p:cNvPr>
@@ -6617,7 +6617,7 @@
     </p:spTree>
     <p:extLst>
       <p:ext uri="{BB962C8B-B14F-4D97-AF65-F5344CB8AC3E}">
-        <p14:creationId xmlns:p14="http://schemas.microsoft.com/office/powerpoint/2010/main" val="1774851519"/>
+        <p14:creationId xmlns:p14="http://schemas.microsoft.com/office/powerpoint/2010/main" val="663591901"/>
       </p:ext>
     </p:extLst>
   </p:cSld>
@@ -6818,7 +6818,7 @@
           <p:cNvPr id="16" name="">
             <a:extLst xmlns:a="http://schemas.openxmlformats.org/drawingml/2006/main">
               <a:ext uri="{FF2B5EF4-FFF2-40B4-BE49-F238E27FC236}">
-                <a16:creationId xmlns:a16="http://schemas.microsoft.com/office/drawing/2014/main" id="{E54EA816-B192-42DB-95A7-992666E58B32}"/>
+                <a16:creationId xmlns:a16="http://schemas.microsoft.com/office/drawing/2014/main" id="{1053D51D-5BB0-4D66-B3A5-65D753BF0DC2}"/>
               </a:ext>
             </a:extLst>
           </p:cNvPr>
@@ -6850,7 +6850,7 @@
           <p:cNvPr id="2" name="">
             <a:extLst xmlns:a="http://schemas.openxmlformats.org/drawingml/2006/main">
               <a:ext uri="{FF2B5EF4-FFF2-40B4-BE49-F238E27FC236}">
-                <a16:creationId xmlns:a16="http://schemas.microsoft.com/office/drawing/2014/main" id="{1CB2546F-578B-4F0F-AD4C-2049389479B8}"/>
+                <a16:creationId xmlns:a16="http://schemas.microsoft.com/office/drawing/2014/main" id="{26098D27-876B-40CB-BFE4-BE30B2A1A94D}"/>
               </a:ext>
             </a:extLst>
           </p:cNvPr>
@@ -6907,7 +6907,7 @@
           <p:cNvPr id="3" name="">
             <a:extLst xmlns:a="http://schemas.openxmlformats.org/drawingml/2006/main">
               <a:ext uri="{FF2B5EF4-FFF2-40B4-BE49-F238E27FC236}">
-                <a16:creationId xmlns:a16="http://schemas.microsoft.com/office/drawing/2014/main" id="{D55B298B-6FFD-497C-8A06-2B1C51DFE7FB}"/>
+                <a16:creationId xmlns:a16="http://schemas.microsoft.com/office/drawing/2014/main" id="{0A96C0AA-DE79-41D0-B3BD-E58166068A13}"/>
               </a:ext>
             </a:extLst>
           </p:cNvPr>
@@ -6939,7 +6939,7 @@
           <p:cNvPr id="4" name="">
             <a:extLst xmlns:a="http://schemas.openxmlformats.org/drawingml/2006/main">
               <a:ext uri="{FF2B5EF4-FFF2-40B4-BE49-F238E27FC236}">
-                <a16:creationId xmlns:a16="http://schemas.microsoft.com/office/drawing/2014/main" id="{8CA8A4DC-7359-4C17-A011-5D72FA016C08}"/>
+                <a16:creationId xmlns:a16="http://schemas.microsoft.com/office/drawing/2014/main" id="{FCD0B439-6F8D-4F29-80F0-9B5EAE2664B6}"/>
               </a:ext>
             </a:extLst>
           </p:cNvPr>
@@ -6996,7 +6996,7 @@
           <p:cNvPr id="5" name="">
             <a:extLst xmlns:a="http://schemas.openxmlformats.org/drawingml/2006/main">
               <a:ext uri="{FF2B5EF4-FFF2-40B4-BE49-F238E27FC236}">
-                <a16:creationId xmlns:a16="http://schemas.microsoft.com/office/drawing/2014/main" id="{581BC5E2-8767-401F-B609-2285FB6C05F4}"/>
+                <a16:creationId xmlns:a16="http://schemas.microsoft.com/office/drawing/2014/main" id="{E5937CC6-B139-45DF-BB47-311C2EA75111}"/>
               </a:ext>
             </a:extLst>
           </p:cNvPr>
@@ -7053,7 +7053,7 @@
           <p:cNvPr id="6" name="">
             <a:extLst xmlns:a="http://schemas.openxmlformats.org/drawingml/2006/main">
               <a:ext uri="{FF2B5EF4-FFF2-40B4-BE49-F238E27FC236}">
-                <a16:creationId xmlns:a16="http://schemas.microsoft.com/office/drawing/2014/main" id="{A152AB47-5630-47D4-B8BB-B2A047A6F144}"/>
+                <a16:creationId xmlns:a16="http://schemas.microsoft.com/office/drawing/2014/main" id="{C8E77808-29E0-4B50-83B8-546F810D1850}"/>
               </a:ext>
             </a:extLst>
           </p:cNvPr>
@@ -7110,7 +7110,7 @@
           <p:cNvPr id="7" name="">
             <a:extLst xmlns:a="http://schemas.openxmlformats.org/drawingml/2006/main">
               <a:ext uri="{FF2B5EF4-FFF2-40B4-BE49-F238E27FC236}">
-                <a16:creationId xmlns:a16="http://schemas.microsoft.com/office/drawing/2014/main" id="{4F567813-5781-4932-A40E-21A2373C4518}"/>
+                <a16:creationId xmlns:a16="http://schemas.microsoft.com/office/drawing/2014/main" id="{AA338E42-F960-4829-A12A-A4B56A33EA6D}"/>
               </a:ext>
             </a:extLst>
           </p:cNvPr>
@@ -7142,7 +7142,7 @@
           <p:cNvPr id="8" name="">
             <a:extLst xmlns:a="http://schemas.openxmlformats.org/drawingml/2006/main">
               <a:ext uri="{FF2B5EF4-FFF2-40B4-BE49-F238E27FC236}">
-                <a16:creationId xmlns:a16="http://schemas.microsoft.com/office/drawing/2014/main" id="{7C0C5517-47AA-429D-AD45-B80EA8609453}"/>
+                <a16:creationId xmlns:a16="http://schemas.microsoft.com/office/drawing/2014/main" id="{9A2827EB-E2A7-49EC-AE48-0B8C63231485}"/>
               </a:ext>
             </a:extLst>
           </p:cNvPr>
@@ -7199,7 +7199,7 @@
           <p:cNvPr id="9" name="">
             <a:extLst xmlns:a="http://schemas.openxmlformats.org/drawingml/2006/main">
               <a:ext uri="{FF2B5EF4-FFF2-40B4-BE49-F238E27FC236}">
-                <a16:creationId xmlns:a16="http://schemas.microsoft.com/office/drawing/2014/main" id="{EB22A602-825C-4635-9BC9-B65A10557D0F}"/>
+                <a16:creationId xmlns:a16="http://schemas.microsoft.com/office/drawing/2014/main" id="{E0BF1024-3B76-47B9-9EB0-52D69D3A45BA}"/>
               </a:ext>
             </a:extLst>
           </p:cNvPr>
@@ -7256,7 +7256,7 @@
           <p:cNvPr id="10" name="">
             <a:extLst xmlns:a="http://schemas.openxmlformats.org/drawingml/2006/main">
               <a:ext uri="{FF2B5EF4-FFF2-40B4-BE49-F238E27FC236}">
-                <a16:creationId xmlns:a16="http://schemas.microsoft.com/office/drawing/2014/main" id="{60096E0F-916B-473A-A44E-012D2610A151}"/>
+                <a16:creationId xmlns:a16="http://schemas.microsoft.com/office/drawing/2014/main" id="{E7E0638B-8CB6-4F75-99F3-46D9075F638A}"/>
               </a:ext>
             </a:extLst>
           </p:cNvPr>
@@ -7313,7 +7313,7 @@
           <p:cNvPr id="11" name="">
             <a:extLst xmlns:a="http://schemas.openxmlformats.org/drawingml/2006/main">
               <a:ext uri="{FF2B5EF4-FFF2-40B4-BE49-F238E27FC236}">
-                <a16:creationId xmlns:a16="http://schemas.microsoft.com/office/drawing/2014/main" id="{F668CC51-E724-4079-BCDF-7CBB33076C8C}"/>
+                <a16:creationId xmlns:a16="http://schemas.microsoft.com/office/drawing/2014/main" id="{DEEB922A-45F8-4DB5-B2BE-61F4A700CB39}"/>
               </a:ext>
             </a:extLst>
           </p:cNvPr>
@@ -7345,7 +7345,7 @@
           <p:cNvPr id="12" name="">
             <a:extLst xmlns:a="http://schemas.openxmlformats.org/drawingml/2006/main">
               <a:ext uri="{FF2B5EF4-FFF2-40B4-BE49-F238E27FC236}">
-                <a16:creationId xmlns:a16="http://schemas.microsoft.com/office/drawing/2014/main" id="{F5031338-704F-4AF5-B824-74229DBE4C1E}"/>
+                <a16:creationId xmlns:a16="http://schemas.microsoft.com/office/drawing/2014/main" id="{CE5DA575-9440-4ED5-8978-1775A88AF4C5}"/>
               </a:ext>
             </a:extLst>
           </p:cNvPr>
@@ -7402,7 +7402,7 @@
           <p:cNvPr id="13" name="">
             <a:extLst xmlns:a="http://schemas.openxmlformats.org/drawingml/2006/main">
               <a:ext uri="{FF2B5EF4-FFF2-40B4-BE49-F238E27FC236}">
-                <a16:creationId xmlns:a16="http://schemas.microsoft.com/office/drawing/2014/main" id="{8E0A0931-892C-4D82-BFB5-E9CDFE2C5765}"/>
+                <a16:creationId xmlns:a16="http://schemas.microsoft.com/office/drawing/2014/main" id="{19BE7003-F34E-44F3-8586-060AA1529B47}"/>
               </a:ext>
             </a:extLst>
           </p:cNvPr>
@@ -7459,7 +7459,7 @@
           <p:cNvPr id="14" name="">
             <a:extLst xmlns:a="http://schemas.openxmlformats.org/drawingml/2006/main">
               <a:ext uri="{FF2B5EF4-FFF2-40B4-BE49-F238E27FC236}">
-                <a16:creationId xmlns:a16="http://schemas.microsoft.com/office/drawing/2014/main" id="{7785C92B-A943-4107-8396-D483F948EF2B}"/>
+                <a16:creationId xmlns:a16="http://schemas.microsoft.com/office/drawing/2014/main" id="{909CC055-61F0-4A2E-88CB-5957D90A2258}"/>
               </a:ext>
             </a:extLst>
           </p:cNvPr>
@@ -7516,7 +7516,7 @@
           <p:cNvPr id="15" name="">
             <a:extLst xmlns:a="http://schemas.openxmlformats.org/drawingml/2006/main">
               <a:ext uri="{FF2B5EF4-FFF2-40B4-BE49-F238E27FC236}">
-                <a16:creationId xmlns:a16="http://schemas.microsoft.com/office/drawing/2014/main" id="{2951CD2A-0B26-479F-AF34-44E416F1C013}"/>
+                <a16:creationId xmlns:a16="http://schemas.microsoft.com/office/drawing/2014/main" id="{A7B52286-3C99-4401-8953-73D3569FC947}"/>
               </a:ext>
             </a:extLst>
           </p:cNvPr>
@@ -7571,7 +7571,7 @@
     </p:spTree>
     <p:extLst>
       <p:ext uri="{BB962C8B-B14F-4D97-AF65-F5344CB8AC3E}">
-        <p14:creationId xmlns:p14="http://schemas.microsoft.com/office/powerpoint/2010/main" val="29324019"/>
+        <p14:creationId xmlns:p14="http://schemas.microsoft.com/office/powerpoint/2010/main" val="1134887976"/>
       </p:ext>
     </p:extLst>
   </p:cSld>
@@ -7772,7 +7772,7 @@
           <p:cNvPr id="23" name="">
             <a:extLst xmlns:a="http://schemas.openxmlformats.org/drawingml/2006/main">
               <a:ext uri="{FF2B5EF4-FFF2-40B4-BE49-F238E27FC236}">
-                <a16:creationId xmlns:a16="http://schemas.microsoft.com/office/drawing/2014/main" id="{45746885-A45F-4F86-A803-CE2C6A383BE2}"/>
+                <a16:creationId xmlns:a16="http://schemas.microsoft.com/office/drawing/2014/main" id="{AC992D36-EE4C-4CCC-825E-E7D67A863636}"/>
               </a:ext>
             </a:extLst>
           </p:cNvPr>
@@ -7804,7 +7804,7 @@
           <p:cNvPr id="2" name="">
             <a:extLst xmlns:a="http://schemas.openxmlformats.org/drawingml/2006/main">
               <a:ext uri="{FF2B5EF4-FFF2-40B4-BE49-F238E27FC236}">
-                <a16:creationId xmlns:a16="http://schemas.microsoft.com/office/drawing/2014/main" id="{C5ABC8D3-909E-47F1-8110-33569EB25FAD}"/>
+                <a16:creationId xmlns:a16="http://schemas.microsoft.com/office/drawing/2014/main" id="{0C15816F-29C0-427E-97BD-75F30CED652F}"/>
               </a:ext>
             </a:extLst>
           </p:cNvPr>
@@ -7861,7 +7861,7 @@
           <p:cNvPr id="3" name="">
             <a:extLst xmlns:a="http://schemas.openxmlformats.org/drawingml/2006/main">
               <a:ext uri="{FF2B5EF4-FFF2-40B4-BE49-F238E27FC236}">
-                <a16:creationId xmlns:a16="http://schemas.microsoft.com/office/drawing/2014/main" id="{4D7EE5D4-45CF-4B35-8709-2E74BB85A2D8}"/>
+                <a16:creationId xmlns:a16="http://schemas.microsoft.com/office/drawing/2014/main" id="{19DE834E-3685-445A-8AF1-589052E92A9C}"/>
               </a:ext>
             </a:extLst>
           </p:cNvPr>
@@ -7893,7 +7893,7 @@
           <p:cNvPr id="4" name="">
             <a:extLst xmlns:a="http://schemas.openxmlformats.org/drawingml/2006/main">
               <a:ext uri="{FF2B5EF4-FFF2-40B4-BE49-F238E27FC236}">
-                <a16:creationId xmlns:a16="http://schemas.microsoft.com/office/drawing/2014/main" id="{73D86570-AA8B-442D-887C-C361D57321CE}"/>
+                <a16:creationId xmlns:a16="http://schemas.microsoft.com/office/drawing/2014/main" id="{47D528CB-673D-41D1-B3A9-7994424564E1}"/>
               </a:ext>
             </a:extLst>
           </p:cNvPr>
@@ -7950,7 +7950,7 @@
           <p:cNvPr id="5" name="">
             <a:extLst xmlns:a="http://schemas.openxmlformats.org/drawingml/2006/main">
               <a:ext uri="{FF2B5EF4-FFF2-40B4-BE49-F238E27FC236}">
-                <a16:creationId xmlns:a16="http://schemas.microsoft.com/office/drawing/2014/main" id="{ADA7FE69-FA68-4881-A71E-4981B62C7392}"/>
+                <a16:creationId xmlns:a16="http://schemas.microsoft.com/office/drawing/2014/main" id="{6FB77765-EEA4-4C9C-A972-0C309C0743BF}"/>
               </a:ext>
             </a:extLst>
           </p:cNvPr>
@@ -8007,7 +8007,7 @@
           <p:cNvPr id="6" name="">
             <a:extLst xmlns:a="http://schemas.openxmlformats.org/drawingml/2006/main">
               <a:ext uri="{FF2B5EF4-FFF2-40B4-BE49-F238E27FC236}">
-                <a16:creationId xmlns:a16="http://schemas.microsoft.com/office/drawing/2014/main" id="{99B653C4-3199-4570-9F0E-A8FB36A376A4}"/>
+                <a16:creationId xmlns:a16="http://schemas.microsoft.com/office/drawing/2014/main" id="{FD85A598-6BB2-421B-A08C-F6C54C5F4250}"/>
               </a:ext>
             </a:extLst>
           </p:cNvPr>
@@ -8064,7 +8064,7 @@
           <p:cNvPr id="7" name="">
             <a:extLst xmlns:a="http://schemas.openxmlformats.org/drawingml/2006/main">
               <a:ext uri="{FF2B5EF4-FFF2-40B4-BE49-F238E27FC236}">
-                <a16:creationId xmlns:a16="http://schemas.microsoft.com/office/drawing/2014/main" id="{44F5CF2F-12E5-416B-AB9F-AAB8E0B30D72}"/>
+                <a16:creationId xmlns:a16="http://schemas.microsoft.com/office/drawing/2014/main" id="{04A3EAF2-5632-4871-8F87-FD7EB8272114}"/>
               </a:ext>
             </a:extLst>
           </p:cNvPr>
@@ -8096,7 +8096,7 @@
           <p:cNvPr id="8" name="">
             <a:extLst xmlns:a="http://schemas.openxmlformats.org/drawingml/2006/main">
               <a:ext uri="{FF2B5EF4-FFF2-40B4-BE49-F238E27FC236}">
-                <a16:creationId xmlns:a16="http://schemas.microsoft.com/office/drawing/2014/main" id="{D62E419B-0249-49A7-B336-36EF3C647B6E}"/>
+                <a16:creationId xmlns:a16="http://schemas.microsoft.com/office/drawing/2014/main" id="{1E0A4502-95CE-4F48-8C06-983973FFAB80}"/>
               </a:ext>
             </a:extLst>
           </p:cNvPr>
@@ -8153,7 +8153,7 @@
           <p:cNvPr id="9" name="">
             <a:extLst xmlns:a="http://schemas.openxmlformats.org/drawingml/2006/main">
               <a:ext uri="{FF2B5EF4-FFF2-40B4-BE49-F238E27FC236}">
-                <a16:creationId xmlns:a16="http://schemas.microsoft.com/office/drawing/2014/main" id="{CC4E2B7D-08F7-4F9F-8F14-84218B9F9733}"/>
+                <a16:creationId xmlns:a16="http://schemas.microsoft.com/office/drawing/2014/main" id="{54D46163-CD0A-4CC5-94AE-287E25FC83CD}"/>
               </a:ext>
             </a:extLst>
           </p:cNvPr>
@@ -8210,19 +8210,19 @@
           <p:cNvPr id="10" name="">
             <a:extLst xmlns:a="http://schemas.openxmlformats.org/drawingml/2006/main">
               <a:ext uri="{FF2B5EF4-FFF2-40B4-BE49-F238E27FC236}">
-                <a16:creationId xmlns:a16="http://schemas.microsoft.com/office/drawing/2014/main" id="{9053808F-A6E9-43B2-89F0-EC1068000CBB}"/>
-              </a:ext>
-            </a:extLst>
-          </p:cNvPr>
-          <p:cNvSpPr>
-            <a:spLocks xmlns:a="http://schemas.openxmlformats.org/drawingml/2006/main" noGrp="1"/>
-          </p:cNvSpPr>
-          <p:nvPr/>
-        </p:nvSpPr>
-        <p:spPr>
-          <a:xfrm xmlns:a="http://schemas.openxmlformats.org/drawingml/2006/main">
-            <a:off x="914400" y="1257300"/>
-            <a:ext cx="10363200" cy="781050"/>
+                <a16:creationId xmlns:a16="http://schemas.microsoft.com/office/drawing/2014/main" id="{81EBCB0D-AFDA-4E25-912D-D010B06F9418}"/>
+              </a:ext>
+            </a:extLst>
+          </p:cNvPr>
+          <p:cNvSpPr>
+            <a:spLocks xmlns:a="http://schemas.openxmlformats.org/drawingml/2006/main" noGrp="1"/>
+          </p:cNvSpPr>
+          <p:nvPr/>
+        </p:nvSpPr>
+        <p:spPr>
+          <a:xfrm xmlns:a="http://schemas.openxmlformats.org/drawingml/2006/main">
+            <a:off x="857250" y="1219200"/>
+            <a:ext cx="10477500" cy="742950"/>
           </a:xfrm>
           <a:prstGeom xmlns:a="http://schemas.openxmlformats.org/drawingml/2006/main" prst="rect">
             <a:avLst/>
@@ -8239,7 +8239,7 @@
           <a:lstStyle xmlns:a="http://schemas.openxmlformats.org/drawingml/2006/main"/>
           <a:p xmlns:a="http://schemas.openxmlformats.org/drawingml/2006/main">
             <a:pPr algn="ctr">
-              <a:defRPr sz="2175" b="1">
+              <a:defRPr sz="2100" b="1">
                 <a:solidFill>
                   <a:srgbClr val="17253A"/>
                 </a:solidFill>
@@ -8249,7 +8249,7 @@
               </a:defRPr>
             </a:pPr>
             <a:r>
-              <a:rPr sz="2175" b="1">
+              <a:rPr sz="2100" b="1">
                 <a:solidFill>
                   <a:srgbClr val="17253A"/>
                 </a:solidFill>
@@ -8267,28 +8267,30 @@
           <p:cNvPr id="11" name="">
             <a:extLst xmlns:a="http://schemas.openxmlformats.org/drawingml/2006/main">
               <a:ext uri="{FF2B5EF4-FFF2-40B4-BE49-F238E27FC236}">
-                <a16:creationId xmlns:a16="http://schemas.microsoft.com/office/drawing/2014/main" id="{D9D2842A-19F6-4842-8613-549703244880}"/>
-              </a:ext>
-            </a:extLst>
-          </p:cNvPr>
-          <p:cNvSpPr>
-            <a:spLocks xmlns:a="http://schemas.openxmlformats.org/drawingml/2006/main" noGrp="1"/>
-          </p:cNvSpPr>
-          <p:nvPr/>
-        </p:nvSpPr>
-        <p:spPr>
-          <a:xfrm xmlns:a="http://schemas.openxmlformats.org/drawingml/2006/main">
-            <a:off x="1000125" y="2247900"/>
-            <a:ext cx="476250" cy="476250"/>
-          </a:xfrm>
-          <a:prstGeom xmlns:a="http://schemas.openxmlformats.org/drawingml/2006/main" prst="ellipse">
+                <a16:creationId xmlns:a16="http://schemas.microsoft.com/office/drawing/2014/main" id="{0F6FE9D7-B97D-488F-A64A-71AA9171AFD4}"/>
+              </a:ext>
+            </a:extLst>
+          </p:cNvPr>
+          <p:cNvSpPr>
+            <a:spLocks xmlns:a="http://schemas.openxmlformats.org/drawingml/2006/main" noGrp="1"/>
+          </p:cNvSpPr>
+          <p:nvPr/>
+        </p:nvSpPr>
+        <p:spPr>
+          <a:xfrm xmlns:a="http://schemas.openxmlformats.org/drawingml/2006/main">
+            <a:off x="971550" y="2124075"/>
+            <a:ext cx="38100" cy="3524250"/>
+          </a:xfrm>
+          <a:prstGeom xmlns:a="http://schemas.openxmlformats.org/drawingml/2006/main" prst="rect">
             <a:avLst/>
           </a:prstGeom>
           <a:solidFill xmlns:a="http://schemas.openxmlformats.org/drawingml/2006/main">
-            <a:srgbClr val="18324A"/>
+            <a:srgbClr val="2C6E73"/>
           </a:solidFill>
           <a:ln xmlns:a="http://schemas.openxmlformats.org/drawingml/2006/main" w="0">
-            <a:noFill/>
+            <a:solidFill>
+              <a:srgbClr val="2C6E73"/>
+            </a:solidFill>
           </a:ln>
         </p:spPr>
       </p:sp>
@@ -8297,19 +8299,19 @@
           <p:cNvPr id="12" name="">
             <a:extLst xmlns:a="http://schemas.openxmlformats.org/drawingml/2006/main">
               <a:ext uri="{FF2B5EF4-FFF2-40B4-BE49-F238E27FC236}">
-                <a16:creationId xmlns:a16="http://schemas.microsoft.com/office/drawing/2014/main" id="{78D6A84A-DA8C-448A-BCF0-8426363CD193}"/>
-              </a:ext>
-            </a:extLst>
-          </p:cNvPr>
-          <p:cNvSpPr>
-            <a:spLocks xmlns:a="http://schemas.openxmlformats.org/drawingml/2006/main" noGrp="1"/>
-          </p:cNvSpPr>
-          <p:nvPr/>
-        </p:nvSpPr>
-        <p:spPr>
-          <a:xfrm xmlns:a="http://schemas.openxmlformats.org/drawingml/2006/main">
-            <a:off x="1000125" y="2276475"/>
-            <a:ext cx="476250" cy="419100"/>
+                <a16:creationId xmlns:a16="http://schemas.microsoft.com/office/drawing/2014/main" id="{DB408005-C217-4659-BB67-C96DB271B5BD}"/>
+              </a:ext>
+            </a:extLst>
+          </p:cNvPr>
+          <p:cNvSpPr>
+            <a:spLocks xmlns:a="http://schemas.openxmlformats.org/drawingml/2006/main" noGrp="1"/>
+          </p:cNvSpPr>
+          <p:nvPr/>
+        </p:nvSpPr>
+        <p:spPr>
+          <a:xfrm xmlns:a="http://schemas.openxmlformats.org/drawingml/2006/main">
+            <a:off x="1162050" y="2200275"/>
+            <a:ext cx="400050" cy="400050"/>
           </a:xfrm>
           <a:prstGeom xmlns:a="http://schemas.openxmlformats.org/drawingml/2006/main" prst="rect">
             <a:avLst/>
@@ -8326,9 +8328,9 @@
           <a:lstStyle xmlns:a="http://schemas.openxmlformats.org/drawingml/2006/main"/>
           <a:p xmlns:a="http://schemas.openxmlformats.org/drawingml/2006/main">
             <a:pPr algn="ctr">
-              <a:defRPr sz="1350" b="1">
-                <a:solidFill>
-                  <a:srgbClr val="FFFFFF"/>
+              <a:defRPr sz="1125" b="1">
+                <a:solidFill>
+                  <a:srgbClr val="2C6E73"/>
                 </a:solidFill>
                 <a:latin typeface="Arial"/>
                 <a:ea typeface="Arial"/>
@@ -8336,9 +8338,9 @@
               </a:defRPr>
             </a:pPr>
             <a:r>
-              <a:rPr sz="1350" b="1">
-                <a:solidFill>
-                  <a:srgbClr val="FFFFFF"/>
+              <a:rPr sz="1125" b="1">
+                <a:solidFill>
+                  <a:srgbClr val="2C6E73"/>
                 </a:solidFill>
                 <a:latin typeface="Arial"/>
                 <a:ea typeface="Arial"/>
@@ -8354,19 +8356,19 @@
           <p:cNvPr id="13" name="">
             <a:extLst xmlns:a="http://schemas.openxmlformats.org/drawingml/2006/main">
               <a:ext uri="{FF2B5EF4-FFF2-40B4-BE49-F238E27FC236}">
-                <a16:creationId xmlns:a16="http://schemas.microsoft.com/office/drawing/2014/main" id="{5C6B7BAB-4895-4E1E-A05C-A360060303FB}"/>
-              </a:ext>
-            </a:extLst>
-          </p:cNvPr>
-          <p:cNvSpPr>
-            <a:spLocks xmlns:a="http://schemas.openxmlformats.org/drawingml/2006/main" noGrp="1"/>
-          </p:cNvSpPr>
-          <p:nvPr/>
-        </p:nvSpPr>
-        <p:spPr>
-          <a:xfrm xmlns:a="http://schemas.openxmlformats.org/drawingml/2006/main">
-            <a:off x="1714500" y="2181225"/>
-            <a:ext cx="9429750" cy="609600"/>
+                <a16:creationId xmlns:a16="http://schemas.microsoft.com/office/drawing/2014/main" id="{CE83766C-7C77-466D-A953-1FB9369F1E80}"/>
+              </a:ext>
+            </a:extLst>
+          </p:cNvPr>
+          <p:cNvSpPr>
+            <a:spLocks xmlns:a="http://schemas.openxmlformats.org/drawingml/2006/main" noGrp="1"/>
+          </p:cNvSpPr>
+          <p:nvPr/>
+        </p:nvSpPr>
+        <p:spPr>
+          <a:xfrm xmlns:a="http://schemas.openxmlformats.org/drawingml/2006/main">
+            <a:off x="1714500" y="2114550"/>
+            <a:ext cx="9525000" cy="809625"/>
           </a:xfrm>
           <a:prstGeom xmlns:a="http://schemas.openxmlformats.org/drawingml/2006/main" prst="rect">
             <a:avLst/>
@@ -8383,7 +8385,7 @@
           <a:lstStyle xmlns:a="http://schemas.openxmlformats.org/drawingml/2006/main"/>
           <a:p xmlns:a="http://schemas.openxmlformats.org/drawingml/2006/main">
             <a:pPr algn="l">
-              <a:defRPr sz="1500" b="0">
+              <a:defRPr sz="1725" b="0">
                 <a:solidFill>
                   <a:srgbClr val="17253A"/>
                 </a:solidFill>
@@ -8393,7 +8395,7 @@
               </a:defRPr>
             </a:pPr>
             <a:r>
-              <a:rPr sz="1500" b="0">
+              <a:rPr sz="1725" b="0">
                 <a:solidFill>
                   <a:srgbClr val="17253A"/>
                 </a:solidFill>
@@ -8401,7 +8403,7 @@
                 <a:ea typeface="Arial"/>
                 <a:cs typeface="Arial"/>
               </a:rPr>
-              <a:t>Identify the structure: Read the number in three-digit periods from left to right.</a:t>
+              <a:t>8,364,219</a:t>
             </a:r>
           </a:p>
         </p:txBody>
@@ -8411,28 +8413,30 @@
           <p:cNvPr id="14" name="">
             <a:extLst xmlns:a="http://schemas.openxmlformats.org/drawingml/2006/main">
               <a:ext uri="{FF2B5EF4-FFF2-40B4-BE49-F238E27FC236}">
-                <a16:creationId xmlns:a16="http://schemas.microsoft.com/office/drawing/2014/main" id="{4820249B-D6D9-4DD2-961F-E77C8EF60890}"/>
-              </a:ext>
-            </a:extLst>
-          </p:cNvPr>
-          <p:cNvSpPr>
-            <a:spLocks xmlns:a="http://schemas.openxmlformats.org/drawingml/2006/main" noGrp="1"/>
-          </p:cNvSpPr>
-          <p:nvPr/>
-        </p:nvSpPr>
-        <p:spPr>
-          <a:xfrm xmlns:a="http://schemas.openxmlformats.org/drawingml/2006/main">
-            <a:off x="1000125" y="2990850"/>
-            <a:ext cx="476250" cy="476250"/>
-          </a:xfrm>
-          <a:prstGeom xmlns:a="http://schemas.openxmlformats.org/drawingml/2006/main" prst="ellipse">
+                <a16:creationId xmlns:a16="http://schemas.microsoft.com/office/drawing/2014/main" id="{1693A651-3AC7-485B-AAAD-EBC73469C169}"/>
+              </a:ext>
+            </a:extLst>
+          </p:cNvPr>
+          <p:cNvSpPr>
+            <a:spLocks xmlns:a="http://schemas.openxmlformats.org/drawingml/2006/main" noGrp="1"/>
+          </p:cNvSpPr>
+          <p:nvPr/>
+        </p:nvSpPr>
+        <p:spPr>
+          <a:xfrm xmlns:a="http://schemas.openxmlformats.org/drawingml/2006/main">
+            <a:off x="1714500" y="2943225"/>
+            <a:ext cx="9334500" cy="9525"/>
+          </a:xfrm>
+          <a:prstGeom xmlns:a="http://schemas.openxmlformats.org/drawingml/2006/main" prst="rect">
             <a:avLst/>
           </a:prstGeom>
           <a:solidFill xmlns:a="http://schemas.openxmlformats.org/drawingml/2006/main">
-            <a:srgbClr val="2C6E73"/>
+            <a:srgbClr val="D9E0E6"/>
           </a:solidFill>
           <a:ln xmlns:a="http://schemas.openxmlformats.org/drawingml/2006/main" w="0">
-            <a:noFill/>
+            <a:solidFill>
+              <a:srgbClr val="D9E0E6"/>
+            </a:solidFill>
           </a:ln>
         </p:spPr>
       </p:sp>
@@ -8441,19 +8445,19 @@
           <p:cNvPr id="15" name="">
             <a:extLst xmlns:a="http://schemas.openxmlformats.org/drawingml/2006/main">
               <a:ext uri="{FF2B5EF4-FFF2-40B4-BE49-F238E27FC236}">
-                <a16:creationId xmlns:a16="http://schemas.microsoft.com/office/drawing/2014/main" id="{276B005B-B906-42C7-A71C-84C553056ED7}"/>
-              </a:ext>
-            </a:extLst>
-          </p:cNvPr>
-          <p:cNvSpPr>
-            <a:spLocks xmlns:a="http://schemas.openxmlformats.org/drawingml/2006/main" noGrp="1"/>
-          </p:cNvSpPr>
-          <p:nvPr/>
-        </p:nvSpPr>
-        <p:spPr>
-          <a:xfrm xmlns:a="http://schemas.openxmlformats.org/drawingml/2006/main">
-            <a:off x="1000125" y="3019425"/>
-            <a:ext cx="476250" cy="419100"/>
+                <a16:creationId xmlns:a16="http://schemas.microsoft.com/office/drawing/2014/main" id="{FFB78D8A-A0B7-4B9C-A519-6AC6F1897186}"/>
+              </a:ext>
+            </a:extLst>
+          </p:cNvPr>
+          <p:cNvSpPr>
+            <a:spLocks xmlns:a="http://schemas.openxmlformats.org/drawingml/2006/main" noGrp="1"/>
+          </p:cNvSpPr>
+          <p:nvPr/>
+        </p:nvSpPr>
+        <p:spPr>
+          <a:xfrm xmlns:a="http://schemas.openxmlformats.org/drawingml/2006/main">
+            <a:off x="1162050" y="3076575"/>
+            <a:ext cx="400050" cy="400050"/>
           </a:xfrm>
           <a:prstGeom xmlns:a="http://schemas.openxmlformats.org/drawingml/2006/main" prst="rect">
             <a:avLst/>
@@ -8470,9 +8474,9 @@
           <a:lstStyle xmlns:a="http://schemas.openxmlformats.org/drawingml/2006/main"/>
           <a:p xmlns:a="http://schemas.openxmlformats.org/drawingml/2006/main">
             <a:pPr algn="ctr">
-              <a:defRPr sz="1350" b="1">
-                <a:solidFill>
-                  <a:srgbClr val="FFFFFF"/>
+              <a:defRPr sz="1125" b="1">
+                <a:solidFill>
+                  <a:srgbClr val="2C6E73"/>
                 </a:solidFill>
                 <a:latin typeface="Arial"/>
                 <a:ea typeface="Arial"/>
@@ -8480,9 +8484,9 @@
               </a:defRPr>
             </a:pPr>
             <a:r>
-              <a:rPr sz="1350" b="1">
-                <a:solidFill>
-                  <a:srgbClr val="FFFFFF"/>
+              <a:rPr sz="1125" b="1">
+                <a:solidFill>
+                  <a:srgbClr val="2C6E73"/>
                 </a:solidFill>
                 <a:latin typeface="Arial"/>
                 <a:ea typeface="Arial"/>
@@ -8498,19 +8502,19 @@
           <p:cNvPr id="16" name="">
             <a:extLst xmlns:a="http://schemas.openxmlformats.org/drawingml/2006/main">
               <a:ext uri="{FF2B5EF4-FFF2-40B4-BE49-F238E27FC236}">
-                <a16:creationId xmlns:a16="http://schemas.microsoft.com/office/drawing/2014/main" id="{6234457E-B837-470E-AE8B-66196F5A9869}"/>
-              </a:ext>
-            </a:extLst>
-          </p:cNvPr>
-          <p:cNvSpPr>
-            <a:spLocks xmlns:a="http://schemas.openxmlformats.org/drawingml/2006/main" noGrp="1"/>
-          </p:cNvSpPr>
-          <p:nvPr/>
-        </p:nvSpPr>
-        <p:spPr>
-          <a:xfrm xmlns:a="http://schemas.openxmlformats.org/drawingml/2006/main">
-            <a:off x="1714500" y="2924175"/>
-            <a:ext cx="9429750" cy="609600"/>
+                <a16:creationId xmlns:a16="http://schemas.microsoft.com/office/drawing/2014/main" id="{9156C0B1-3C8D-456F-B8B2-45E1DBA6795B}"/>
+              </a:ext>
+            </a:extLst>
+          </p:cNvPr>
+          <p:cNvSpPr>
+            <a:spLocks xmlns:a="http://schemas.openxmlformats.org/drawingml/2006/main" noGrp="1"/>
+          </p:cNvSpPr>
+          <p:nvPr/>
+        </p:nvSpPr>
+        <p:spPr>
+          <a:xfrm xmlns:a="http://schemas.openxmlformats.org/drawingml/2006/main">
+            <a:off x="1714500" y="2990850"/>
+            <a:ext cx="9525000" cy="809625"/>
           </a:xfrm>
           <a:prstGeom xmlns:a="http://schemas.openxmlformats.org/drawingml/2006/main" prst="rect">
             <a:avLst/>
@@ -8527,7 +8531,7 @@
           <a:lstStyle xmlns:a="http://schemas.openxmlformats.org/drawingml/2006/main"/>
           <a:p xmlns:a="http://schemas.openxmlformats.org/drawingml/2006/main">
             <a:pPr algn="l">
-              <a:defRPr sz="1500" b="0">
+              <a:defRPr sz="1725" b="0">
                 <a:solidFill>
                   <a:srgbClr val="17253A"/>
                 </a:solidFill>
@@ -8537,7 +8541,7 @@
               </a:defRPr>
             </a:pPr>
             <a:r>
-              <a:rPr sz="1500" b="0">
+              <a:rPr sz="1725" b="0">
                 <a:solidFill>
                   <a:srgbClr val="17253A"/>
                 </a:solidFill>
@@ -8545,7 +8549,7 @@
                 <a:ea typeface="Arial"/>
                 <a:cs typeface="Arial"/>
               </a:rPr>
-              <a:t>Set up the method: Record each digit in the correct place-value column.</a:t>
+              <a:t>3 is in the hundred-thousands column</a:t>
             </a:r>
           </a:p>
         </p:txBody>
@@ -8555,28 +8559,30 @@
           <p:cNvPr id="17" name="">
             <a:extLst xmlns:a="http://schemas.openxmlformats.org/drawingml/2006/main">
               <a:ext uri="{FF2B5EF4-FFF2-40B4-BE49-F238E27FC236}">
-                <a16:creationId xmlns:a16="http://schemas.microsoft.com/office/drawing/2014/main" id="{778B287E-2F0C-4AE4-8349-BA4099971C25}"/>
-              </a:ext>
-            </a:extLst>
-          </p:cNvPr>
-          <p:cNvSpPr>
-            <a:spLocks xmlns:a="http://schemas.openxmlformats.org/drawingml/2006/main" noGrp="1"/>
-          </p:cNvSpPr>
-          <p:nvPr/>
-        </p:nvSpPr>
-        <p:spPr>
-          <a:xfrm xmlns:a="http://schemas.openxmlformats.org/drawingml/2006/main">
-            <a:off x="1000125" y="3733800"/>
-            <a:ext cx="476250" cy="476250"/>
-          </a:xfrm>
-          <a:prstGeom xmlns:a="http://schemas.openxmlformats.org/drawingml/2006/main" prst="ellipse">
+                <a16:creationId xmlns:a16="http://schemas.microsoft.com/office/drawing/2014/main" id="{6A55D25D-6FA0-479D-B504-CA7E87B6AC1F}"/>
+              </a:ext>
+            </a:extLst>
+          </p:cNvPr>
+          <p:cNvSpPr>
+            <a:spLocks xmlns:a="http://schemas.openxmlformats.org/drawingml/2006/main" noGrp="1"/>
+          </p:cNvSpPr>
+          <p:nvPr/>
+        </p:nvSpPr>
+        <p:spPr>
+          <a:xfrm xmlns:a="http://schemas.openxmlformats.org/drawingml/2006/main">
+            <a:off x="1714500" y="3819525"/>
+            <a:ext cx="9334500" cy="9525"/>
+          </a:xfrm>
+          <a:prstGeom xmlns:a="http://schemas.openxmlformats.org/drawingml/2006/main" prst="rect">
             <a:avLst/>
           </a:prstGeom>
           <a:solidFill xmlns:a="http://schemas.openxmlformats.org/drawingml/2006/main">
-            <a:srgbClr val="2C6E73"/>
+            <a:srgbClr val="D9E0E6"/>
           </a:solidFill>
           <a:ln xmlns:a="http://schemas.openxmlformats.org/drawingml/2006/main" w="0">
-            <a:noFill/>
+            <a:solidFill>
+              <a:srgbClr val="D9E0E6"/>
+            </a:solidFill>
           </a:ln>
         </p:spPr>
       </p:sp>
@@ -8585,19 +8591,19 @@
           <p:cNvPr id="18" name="">
             <a:extLst xmlns:a="http://schemas.openxmlformats.org/drawingml/2006/main">
               <a:ext uri="{FF2B5EF4-FFF2-40B4-BE49-F238E27FC236}">
-                <a16:creationId xmlns:a16="http://schemas.microsoft.com/office/drawing/2014/main" id="{E6408C76-686A-43B8-8DB1-D8722CB4EAAD}"/>
-              </a:ext>
-            </a:extLst>
-          </p:cNvPr>
-          <p:cNvSpPr>
-            <a:spLocks xmlns:a="http://schemas.openxmlformats.org/drawingml/2006/main" noGrp="1"/>
-          </p:cNvSpPr>
-          <p:nvPr/>
-        </p:nvSpPr>
-        <p:spPr>
-          <a:xfrm xmlns:a="http://schemas.openxmlformats.org/drawingml/2006/main">
-            <a:off x="1000125" y="3762375"/>
-            <a:ext cx="476250" cy="419100"/>
+                <a16:creationId xmlns:a16="http://schemas.microsoft.com/office/drawing/2014/main" id="{4F5757E5-1F27-4AF7-A2D8-07C28E7F1599}"/>
+              </a:ext>
+            </a:extLst>
+          </p:cNvPr>
+          <p:cNvSpPr>
+            <a:spLocks xmlns:a="http://schemas.openxmlformats.org/drawingml/2006/main" noGrp="1"/>
+          </p:cNvSpPr>
+          <p:nvPr/>
+        </p:nvSpPr>
+        <p:spPr>
+          <a:xfrm xmlns:a="http://schemas.openxmlformats.org/drawingml/2006/main">
+            <a:off x="1162050" y="3952875"/>
+            <a:ext cx="400050" cy="400050"/>
           </a:xfrm>
           <a:prstGeom xmlns:a="http://schemas.openxmlformats.org/drawingml/2006/main" prst="rect">
             <a:avLst/>
@@ -8614,9 +8620,9 @@
           <a:lstStyle xmlns:a="http://schemas.openxmlformats.org/drawingml/2006/main"/>
           <a:p xmlns:a="http://schemas.openxmlformats.org/drawingml/2006/main">
             <a:pPr algn="ctr">
-              <a:defRPr sz="1350" b="1">
-                <a:solidFill>
-                  <a:srgbClr val="FFFFFF"/>
+              <a:defRPr sz="1125" b="1">
+                <a:solidFill>
+                  <a:srgbClr val="2C6E73"/>
                 </a:solidFill>
                 <a:latin typeface="Arial"/>
                 <a:ea typeface="Arial"/>
@@ -8624,9 +8630,9 @@
               </a:defRPr>
             </a:pPr>
             <a:r>
-              <a:rPr sz="1350" b="1">
-                <a:solidFill>
-                  <a:srgbClr val="FFFFFF"/>
+              <a:rPr sz="1125" b="1">
+                <a:solidFill>
+                  <a:srgbClr val="2C6E73"/>
                 </a:solidFill>
                 <a:latin typeface="Arial"/>
                 <a:ea typeface="Arial"/>
@@ -8642,19 +8648,19 @@
           <p:cNvPr id="19" name="">
             <a:extLst xmlns:a="http://schemas.openxmlformats.org/drawingml/2006/main">
               <a:ext uri="{FF2B5EF4-FFF2-40B4-BE49-F238E27FC236}">
-                <a16:creationId xmlns:a16="http://schemas.microsoft.com/office/drawing/2014/main" id="{9348A040-E0BB-42AF-8D5B-1E5DFAEBD3B2}"/>
-              </a:ext>
-            </a:extLst>
-          </p:cNvPr>
-          <p:cNvSpPr>
-            <a:spLocks xmlns:a="http://schemas.openxmlformats.org/drawingml/2006/main" noGrp="1"/>
-          </p:cNvSpPr>
-          <p:nvPr/>
-        </p:nvSpPr>
-        <p:spPr>
-          <a:xfrm xmlns:a="http://schemas.openxmlformats.org/drawingml/2006/main">
-            <a:off x="1714500" y="3667125"/>
-            <a:ext cx="9429750" cy="609600"/>
+                <a16:creationId xmlns:a16="http://schemas.microsoft.com/office/drawing/2014/main" id="{34DC6414-B379-48DE-8D87-EBBCF0DCADAA}"/>
+              </a:ext>
+            </a:extLst>
+          </p:cNvPr>
+          <p:cNvSpPr>
+            <a:spLocks xmlns:a="http://schemas.openxmlformats.org/drawingml/2006/main" noGrp="1"/>
+          </p:cNvSpPr>
+          <p:nvPr/>
+        </p:nvSpPr>
+        <p:spPr>
+          <a:xfrm xmlns:a="http://schemas.openxmlformats.org/drawingml/2006/main">
+            <a:off x="1714500" y="3867150"/>
+            <a:ext cx="9525000" cy="809625"/>
           </a:xfrm>
           <a:prstGeom xmlns:a="http://schemas.openxmlformats.org/drawingml/2006/main" prst="rect">
             <a:avLst/>
@@ -8671,7 +8677,7 @@
           <a:lstStyle xmlns:a="http://schemas.openxmlformats.org/drawingml/2006/main"/>
           <a:p xmlns:a="http://schemas.openxmlformats.org/drawingml/2006/main">
             <a:pPr algn="l">
-              <a:defRPr sz="1500" b="0">
+              <a:defRPr sz="1725" b="0">
                 <a:solidFill>
                   <a:srgbClr val="17253A"/>
                 </a:solidFill>
@@ -8681,7 +8687,7 @@
               </a:defRPr>
             </a:pPr>
             <a:r>
-              <a:rPr sz="1500" b="0">
+              <a:rPr sz="1725" b="0">
                 <a:solidFill>
                   <a:srgbClr val="17253A"/>
                 </a:solidFill>
@@ -8689,7 +8695,7 @@
                 <a:ea typeface="Arial"/>
                 <a:cs typeface="Arial"/>
               </a:rPr>
-              <a:t>Complete the calculation: 300,000.</a:t>
+              <a:t>3 × 100,000</a:t>
             </a:r>
           </a:p>
         </p:txBody>
@@ -8699,28 +8705,30 @@
           <p:cNvPr id="20" name="">
             <a:extLst xmlns:a="http://schemas.openxmlformats.org/drawingml/2006/main">
               <a:ext uri="{FF2B5EF4-FFF2-40B4-BE49-F238E27FC236}">
-                <a16:creationId xmlns:a16="http://schemas.microsoft.com/office/drawing/2014/main" id="{73E61631-4D2E-4B2D-93D4-2BB2D7C960DA}"/>
-              </a:ext>
-            </a:extLst>
-          </p:cNvPr>
-          <p:cNvSpPr>
-            <a:spLocks xmlns:a="http://schemas.openxmlformats.org/drawingml/2006/main" noGrp="1"/>
-          </p:cNvSpPr>
-          <p:nvPr/>
-        </p:nvSpPr>
-        <p:spPr>
-          <a:xfrm xmlns:a="http://schemas.openxmlformats.org/drawingml/2006/main">
-            <a:off x="1000125" y="4476750"/>
-            <a:ext cx="476250" cy="476250"/>
-          </a:xfrm>
-          <a:prstGeom xmlns:a="http://schemas.openxmlformats.org/drawingml/2006/main" prst="ellipse">
+                <a16:creationId xmlns:a16="http://schemas.microsoft.com/office/drawing/2014/main" id="{F1983694-1F3D-4F9D-96D6-35F569D9AB16}"/>
+              </a:ext>
+            </a:extLst>
+          </p:cNvPr>
+          <p:cNvSpPr>
+            <a:spLocks xmlns:a="http://schemas.openxmlformats.org/drawingml/2006/main" noGrp="1"/>
+          </p:cNvSpPr>
+          <p:nvPr/>
+        </p:nvSpPr>
+        <p:spPr>
+          <a:xfrm xmlns:a="http://schemas.openxmlformats.org/drawingml/2006/main">
+            <a:off x="1714500" y="4695825"/>
+            <a:ext cx="9334500" cy="9525"/>
+          </a:xfrm>
+          <a:prstGeom xmlns:a="http://schemas.openxmlformats.org/drawingml/2006/main" prst="rect">
             <a:avLst/>
           </a:prstGeom>
           <a:solidFill xmlns:a="http://schemas.openxmlformats.org/drawingml/2006/main">
-            <a:srgbClr val="2C6E73"/>
+            <a:srgbClr val="D9E0E6"/>
           </a:solidFill>
           <a:ln xmlns:a="http://schemas.openxmlformats.org/drawingml/2006/main" w="0">
-            <a:noFill/>
+            <a:solidFill>
+              <a:srgbClr val="D9E0E6"/>
+            </a:solidFill>
           </a:ln>
         </p:spPr>
       </p:sp>
@@ -8729,19 +8737,19 @@
           <p:cNvPr id="21" name="">
             <a:extLst xmlns:a="http://schemas.openxmlformats.org/drawingml/2006/main">
               <a:ext uri="{FF2B5EF4-FFF2-40B4-BE49-F238E27FC236}">
-                <a16:creationId xmlns:a16="http://schemas.microsoft.com/office/drawing/2014/main" id="{87296305-884D-4C4D-999A-BC876B2480CF}"/>
-              </a:ext>
-            </a:extLst>
-          </p:cNvPr>
-          <p:cNvSpPr>
-            <a:spLocks xmlns:a="http://schemas.openxmlformats.org/drawingml/2006/main" noGrp="1"/>
-          </p:cNvSpPr>
-          <p:nvPr/>
-        </p:nvSpPr>
-        <p:spPr>
-          <a:xfrm xmlns:a="http://schemas.openxmlformats.org/drawingml/2006/main">
-            <a:off x="1000125" y="4505325"/>
-            <a:ext cx="476250" cy="419100"/>
+                <a16:creationId xmlns:a16="http://schemas.microsoft.com/office/drawing/2014/main" id="{A2489D8F-22D4-4715-8331-DC9A27B85446}"/>
+              </a:ext>
+            </a:extLst>
+          </p:cNvPr>
+          <p:cNvSpPr>
+            <a:spLocks xmlns:a="http://schemas.openxmlformats.org/drawingml/2006/main" noGrp="1"/>
+          </p:cNvSpPr>
+          <p:nvPr/>
+        </p:nvSpPr>
+        <p:spPr>
+          <a:xfrm xmlns:a="http://schemas.openxmlformats.org/drawingml/2006/main">
+            <a:off x="1162050" y="4829175"/>
+            <a:ext cx="400050" cy="400050"/>
           </a:xfrm>
           <a:prstGeom xmlns:a="http://schemas.openxmlformats.org/drawingml/2006/main" prst="rect">
             <a:avLst/>
@@ -8758,9 +8766,9 @@
           <a:lstStyle xmlns:a="http://schemas.openxmlformats.org/drawingml/2006/main"/>
           <a:p xmlns:a="http://schemas.openxmlformats.org/drawingml/2006/main">
             <a:pPr algn="ctr">
-              <a:defRPr sz="1350" b="1">
-                <a:solidFill>
-                  <a:srgbClr val="FFFFFF"/>
+              <a:defRPr sz="1125" b="1">
+                <a:solidFill>
+                  <a:srgbClr val="2F785D"/>
                 </a:solidFill>
                 <a:latin typeface="Arial"/>
                 <a:ea typeface="Arial"/>
@@ -8768,9 +8776,9 @@
               </a:defRPr>
             </a:pPr>
             <a:r>
-              <a:rPr sz="1350" b="1">
-                <a:solidFill>
-                  <a:srgbClr val="FFFFFF"/>
+              <a:rPr sz="1125" b="1">
+                <a:solidFill>
+                  <a:srgbClr val="2F785D"/>
                 </a:solidFill>
                 <a:latin typeface="Arial"/>
                 <a:ea typeface="Arial"/>
@@ -8786,19 +8794,19 @@
           <p:cNvPr id="22" name="">
             <a:extLst xmlns:a="http://schemas.openxmlformats.org/drawingml/2006/main">
               <a:ext uri="{FF2B5EF4-FFF2-40B4-BE49-F238E27FC236}">
-                <a16:creationId xmlns:a16="http://schemas.microsoft.com/office/drawing/2014/main" id="{80BC1697-6948-4978-8B02-2FB1962722C5}"/>
-              </a:ext>
-            </a:extLst>
-          </p:cNvPr>
-          <p:cNvSpPr>
-            <a:spLocks xmlns:a="http://schemas.openxmlformats.org/drawingml/2006/main" noGrp="1"/>
-          </p:cNvSpPr>
-          <p:nvPr/>
-        </p:nvSpPr>
-        <p:spPr>
-          <a:xfrm xmlns:a="http://schemas.openxmlformats.org/drawingml/2006/main">
-            <a:off x="1714500" y="4410075"/>
-            <a:ext cx="9429750" cy="609600"/>
+                <a16:creationId xmlns:a16="http://schemas.microsoft.com/office/drawing/2014/main" id="{4D4D0B28-A716-433E-94A6-7E558F9DA1EC}"/>
+              </a:ext>
+            </a:extLst>
+          </p:cNvPr>
+          <p:cNvSpPr>
+            <a:spLocks xmlns:a="http://schemas.openxmlformats.org/drawingml/2006/main" noGrp="1"/>
+          </p:cNvSpPr>
+          <p:nvPr/>
+        </p:nvSpPr>
+        <p:spPr>
+          <a:xfrm xmlns:a="http://schemas.openxmlformats.org/drawingml/2006/main">
+            <a:off x="1714500" y="4743450"/>
+            <a:ext cx="9525000" cy="809625"/>
           </a:xfrm>
           <a:prstGeom xmlns:a="http://schemas.openxmlformats.org/drawingml/2006/main" prst="rect">
             <a:avLst/>
@@ -8815,7 +8823,7 @@
           <a:lstStyle xmlns:a="http://schemas.openxmlformats.org/drawingml/2006/main"/>
           <a:p xmlns:a="http://schemas.openxmlformats.org/drawingml/2006/main">
             <a:pPr algn="l">
-              <a:defRPr sz="1500" b="1">
+              <a:defRPr sz="1725" b="1">
                 <a:solidFill>
                   <a:srgbClr val="2F785D"/>
                 </a:solidFill>
@@ -8825,7 +8833,7 @@
               </a:defRPr>
             </a:pPr>
             <a:r>
-              <a:rPr sz="1500" b="1">
+              <a:rPr sz="1725" b="1">
                 <a:solidFill>
                   <a:srgbClr val="2F785D"/>
                 </a:solidFill>
@@ -8833,7 +8841,7 @@
                 <a:ea typeface="Arial"/>
                 <a:cs typeface="Arial"/>
               </a:rPr>
-              <a:t>Check the result: Check the value of every zero and compare from the greatest place.</a:t>
+              <a:t>300,000</a:t>
             </a:r>
           </a:p>
         </p:txBody>
@@ -8841,7 +8849,7 @@
     </p:spTree>
     <p:extLst>
       <p:ext uri="{BB962C8B-B14F-4D97-AF65-F5344CB8AC3E}">
-        <p14:creationId xmlns:p14="http://schemas.microsoft.com/office/powerpoint/2010/main" val="609546923"/>
+        <p14:creationId xmlns:p14="http://schemas.microsoft.com/office/powerpoint/2010/main" val="1769151827"/>
       </p:ext>
     </p:extLst>
   </p:cSld>
@@ -9134,7 +9142,7 @@
           <p:cNvPr id="15" name="">
             <a:extLst xmlns:a="http://schemas.openxmlformats.org/drawingml/2006/main">
               <a:ext uri="{FF2B5EF4-FFF2-40B4-BE49-F238E27FC236}">
-                <a16:creationId xmlns:a16="http://schemas.microsoft.com/office/drawing/2014/main" id="{88BCDA7C-B56D-4F57-9D07-90866FF8C3B1}"/>
+                <a16:creationId xmlns:a16="http://schemas.microsoft.com/office/drawing/2014/main" id="{7D4EEF28-E930-4916-87E7-698B6C80246B}"/>
               </a:ext>
             </a:extLst>
           </p:cNvPr>
@@ -9166,7 +9174,7 @@
           <p:cNvPr id="2" name="">
             <a:extLst xmlns:a="http://schemas.openxmlformats.org/drawingml/2006/main">
               <a:ext uri="{FF2B5EF4-FFF2-40B4-BE49-F238E27FC236}">
-                <a16:creationId xmlns:a16="http://schemas.microsoft.com/office/drawing/2014/main" id="{58B1A8A1-CD8F-4410-A6E7-0B12623C958C}"/>
+                <a16:creationId xmlns:a16="http://schemas.microsoft.com/office/drawing/2014/main" id="{34394BCF-4476-4436-B8FB-F138357ED011}"/>
               </a:ext>
             </a:extLst>
           </p:cNvPr>
@@ -9223,7 +9231,7 @@
           <p:cNvPr id="3" name="">
             <a:extLst xmlns:a="http://schemas.openxmlformats.org/drawingml/2006/main">
               <a:ext uri="{FF2B5EF4-FFF2-40B4-BE49-F238E27FC236}">
-                <a16:creationId xmlns:a16="http://schemas.microsoft.com/office/drawing/2014/main" id="{9889494D-A748-4133-97AA-96B2302B3325}"/>
+                <a16:creationId xmlns:a16="http://schemas.microsoft.com/office/drawing/2014/main" id="{04659D9A-0E80-4701-9033-5EF2925EAC61}"/>
               </a:ext>
             </a:extLst>
           </p:cNvPr>
@@ -9255,7 +9263,7 @@
           <p:cNvPr id="4" name="">
             <a:extLst xmlns:a="http://schemas.openxmlformats.org/drawingml/2006/main">
               <a:ext uri="{FF2B5EF4-FFF2-40B4-BE49-F238E27FC236}">
-                <a16:creationId xmlns:a16="http://schemas.microsoft.com/office/drawing/2014/main" id="{E23933F6-D0A1-4234-8415-2E1B7A4670D7}"/>
+                <a16:creationId xmlns:a16="http://schemas.microsoft.com/office/drawing/2014/main" id="{EC1606A8-5A3D-4B98-B86B-C601EAB32200}"/>
               </a:ext>
             </a:extLst>
           </p:cNvPr>
@@ -9312,7 +9320,7 @@
           <p:cNvPr id="5" name="">
             <a:extLst xmlns:a="http://schemas.openxmlformats.org/drawingml/2006/main">
               <a:ext uri="{FF2B5EF4-FFF2-40B4-BE49-F238E27FC236}">
-                <a16:creationId xmlns:a16="http://schemas.microsoft.com/office/drawing/2014/main" id="{8544640C-9F33-4842-9B18-A4C7F74698F3}"/>
+                <a16:creationId xmlns:a16="http://schemas.microsoft.com/office/drawing/2014/main" id="{0DD0C2A0-70D0-4560-898D-6EA3C4C2569C}"/>
               </a:ext>
             </a:extLst>
           </p:cNvPr>
@@ -9369,7 +9377,7 @@
           <p:cNvPr id="6" name="">
             <a:extLst xmlns:a="http://schemas.openxmlformats.org/drawingml/2006/main">
               <a:ext uri="{FF2B5EF4-FFF2-40B4-BE49-F238E27FC236}">
-                <a16:creationId xmlns:a16="http://schemas.microsoft.com/office/drawing/2014/main" id="{EB522273-AC64-4F92-BE59-98E81D274324}"/>
+                <a16:creationId xmlns:a16="http://schemas.microsoft.com/office/drawing/2014/main" id="{C5BDB084-2EAA-4486-A8A2-A7BBBDFBFB2A}"/>
               </a:ext>
             </a:extLst>
           </p:cNvPr>
@@ -9426,7 +9434,7 @@
           <p:cNvPr id="7" name="">
             <a:extLst xmlns:a="http://schemas.openxmlformats.org/drawingml/2006/main">
               <a:ext uri="{FF2B5EF4-FFF2-40B4-BE49-F238E27FC236}">
-                <a16:creationId xmlns:a16="http://schemas.microsoft.com/office/drawing/2014/main" id="{4A190F57-0645-4F17-9C0B-A9DAA1495C50}"/>
+                <a16:creationId xmlns:a16="http://schemas.microsoft.com/office/drawing/2014/main" id="{F76BB0E6-5F2B-42C9-AE4F-A96EC89C5DA0}"/>
               </a:ext>
             </a:extLst>
           </p:cNvPr>
@@ -9458,7 +9466,7 @@
           <p:cNvPr id="8" name="">
             <a:extLst xmlns:a="http://schemas.openxmlformats.org/drawingml/2006/main">
               <a:ext uri="{FF2B5EF4-FFF2-40B4-BE49-F238E27FC236}">
-                <a16:creationId xmlns:a16="http://schemas.microsoft.com/office/drawing/2014/main" id="{38A0C7ED-94AA-4AE2-AE74-6BA2F6337AFD}"/>
+                <a16:creationId xmlns:a16="http://schemas.microsoft.com/office/drawing/2014/main" id="{2D44EA38-D58A-4ABA-B295-7B6E08A35E4C}"/>
               </a:ext>
             </a:extLst>
           </p:cNvPr>
@@ -9515,7 +9523,7 @@
           <p:cNvPr id="9" name="">
             <a:extLst xmlns:a="http://schemas.openxmlformats.org/drawingml/2006/main">
               <a:ext uri="{FF2B5EF4-FFF2-40B4-BE49-F238E27FC236}">
-                <a16:creationId xmlns:a16="http://schemas.microsoft.com/office/drawing/2014/main" id="{18FF96C5-86B0-46E1-9BEA-A3677499A0B5}"/>
+                <a16:creationId xmlns:a16="http://schemas.microsoft.com/office/drawing/2014/main" id="{345188F8-5AA0-4246-BC02-7E06D0D2D944}"/>
               </a:ext>
             </a:extLst>
           </p:cNvPr>
@@ -9572,7 +9580,7 @@
           <p:cNvPr id="10" name="">
             <a:extLst xmlns:a="http://schemas.openxmlformats.org/drawingml/2006/main">
               <a:ext uri="{FF2B5EF4-FFF2-40B4-BE49-F238E27FC236}">
-                <a16:creationId xmlns:a16="http://schemas.microsoft.com/office/drawing/2014/main" id="{97712314-06F9-49FA-B6A0-4BF200054C16}"/>
+                <a16:creationId xmlns:a16="http://schemas.microsoft.com/office/drawing/2014/main" id="{8E49BA8B-D6CE-440C-B668-A050CA5348AF}"/>
               </a:ext>
             </a:extLst>
           </p:cNvPr>
@@ -9629,7 +9637,7 @@
           <p:cNvPr id="11" name="">
             <a:extLst xmlns:a="http://schemas.openxmlformats.org/drawingml/2006/main">
               <a:ext uri="{FF2B5EF4-FFF2-40B4-BE49-F238E27FC236}">
-                <a16:creationId xmlns:a16="http://schemas.microsoft.com/office/drawing/2014/main" id="{A866AF39-6E4D-4FE0-A429-71EFA323036C}"/>
+                <a16:creationId xmlns:a16="http://schemas.microsoft.com/office/drawing/2014/main" id="{BC2EEA1D-3D53-4B38-B710-3D50DA01788C}"/>
               </a:ext>
             </a:extLst>
           </p:cNvPr>
@@ -9686,7 +9694,7 @@
           <p:cNvPr id="12" name="">
             <a:extLst xmlns:a="http://schemas.openxmlformats.org/drawingml/2006/main">
               <a:ext uri="{FF2B5EF4-FFF2-40B4-BE49-F238E27FC236}">
-                <a16:creationId xmlns:a16="http://schemas.microsoft.com/office/drawing/2014/main" id="{B24340E2-6F70-4B9F-8E5F-4243BD30B098}"/>
+                <a16:creationId xmlns:a16="http://schemas.microsoft.com/office/drawing/2014/main" id="{1FACCFBA-5904-487A-8E31-5C03A8301BD8}"/>
               </a:ext>
             </a:extLst>
           </p:cNvPr>
@@ -9718,7 +9726,7 @@
           <p:cNvPr id="13" name="">
             <a:extLst xmlns:a="http://schemas.openxmlformats.org/drawingml/2006/main">
               <a:ext uri="{FF2B5EF4-FFF2-40B4-BE49-F238E27FC236}">
-                <a16:creationId xmlns:a16="http://schemas.microsoft.com/office/drawing/2014/main" id="{D46B2E21-E3F4-4001-98B1-020895691389}"/>
+                <a16:creationId xmlns:a16="http://schemas.microsoft.com/office/drawing/2014/main" id="{EE8F6CD1-74F5-4836-9CBB-0AACC3C946CD}"/>
               </a:ext>
             </a:extLst>
           </p:cNvPr>
@@ -9775,7 +9783,7 @@
           <p:cNvPr id="14" name="">
             <a:extLst xmlns:a="http://schemas.openxmlformats.org/drawingml/2006/main">
               <a:ext uri="{FF2B5EF4-FFF2-40B4-BE49-F238E27FC236}">
-                <a16:creationId xmlns:a16="http://schemas.microsoft.com/office/drawing/2014/main" id="{3BCEF92A-8C57-4041-97AD-BD73E6C56AE2}"/>
+                <a16:creationId xmlns:a16="http://schemas.microsoft.com/office/drawing/2014/main" id="{D43B581C-609F-4B60-8FFE-9E4F919B80A6}"/>
               </a:ext>
             </a:extLst>
           </p:cNvPr>
@@ -9830,7 +9838,7 @@
     </p:spTree>
     <p:extLst>
       <p:ext uri="{BB962C8B-B14F-4D97-AF65-F5344CB8AC3E}">
-        <p14:creationId xmlns:p14="http://schemas.microsoft.com/office/powerpoint/2010/main" val="1905118898"/>
+        <p14:creationId xmlns:p14="http://schemas.microsoft.com/office/powerpoint/2010/main" val="1029110474"/>
       </p:ext>
     </p:extLst>
   </p:cSld>
@@ -10031,7 +10039,7 @@
           <p:cNvPr id="16" name="">
             <a:extLst xmlns:a="http://schemas.openxmlformats.org/drawingml/2006/main">
               <a:ext uri="{FF2B5EF4-FFF2-40B4-BE49-F238E27FC236}">
-                <a16:creationId xmlns:a16="http://schemas.microsoft.com/office/drawing/2014/main" id="{C892D4EB-CC58-4210-82CE-01114FCD2A23}"/>
+                <a16:creationId xmlns:a16="http://schemas.microsoft.com/office/drawing/2014/main" id="{9FC5B521-BA04-4255-BCE3-714897CF4661}"/>
               </a:ext>
             </a:extLst>
           </p:cNvPr>
@@ -10063,7 +10071,7 @@
           <p:cNvPr id="2" name="">
             <a:extLst xmlns:a="http://schemas.openxmlformats.org/drawingml/2006/main">
               <a:ext uri="{FF2B5EF4-FFF2-40B4-BE49-F238E27FC236}">
-                <a16:creationId xmlns:a16="http://schemas.microsoft.com/office/drawing/2014/main" id="{40CE6601-5ADB-4234-8CD8-63DCF92DAB6D}"/>
+                <a16:creationId xmlns:a16="http://schemas.microsoft.com/office/drawing/2014/main" id="{DE314FD8-C06C-4AA9-A875-DA9C16F6DA48}"/>
               </a:ext>
             </a:extLst>
           </p:cNvPr>
@@ -10120,7 +10128,7 @@
           <p:cNvPr id="3" name="">
             <a:extLst xmlns:a="http://schemas.openxmlformats.org/drawingml/2006/main">
               <a:ext uri="{FF2B5EF4-FFF2-40B4-BE49-F238E27FC236}">
-                <a16:creationId xmlns:a16="http://schemas.microsoft.com/office/drawing/2014/main" id="{B1393298-A07B-448D-93A8-AF089FD78444}"/>
+                <a16:creationId xmlns:a16="http://schemas.microsoft.com/office/drawing/2014/main" id="{01B21F7C-0B6D-4715-9202-9B29D2FBA10F}"/>
               </a:ext>
             </a:extLst>
           </p:cNvPr>
@@ -10152,7 +10160,7 @@
           <p:cNvPr id="4" name="">
             <a:extLst xmlns:a="http://schemas.openxmlformats.org/drawingml/2006/main">
               <a:ext uri="{FF2B5EF4-FFF2-40B4-BE49-F238E27FC236}">
-                <a16:creationId xmlns:a16="http://schemas.microsoft.com/office/drawing/2014/main" id="{7CE6C1E6-2C12-4D61-9286-8ABD534F8166}"/>
+                <a16:creationId xmlns:a16="http://schemas.microsoft.com/office/drawing/2014/main" id="{475201B4-A67E-4BB5-89D2-CC87C521664F}"/>
               </a:ext>
             </a:extLst>
           </p:cNvPr>
@@ -10209,7 +10217,7 @@
           <p:cNvPr id="5" name="">
             <a:extLst xmlns:a="http://schemas.openxmlformats.org/drawingml/2006/main">
               <a:ext uri="{FF2B5EF4-FFF2-40B4-BE49-F238E27FC236}">
-                <a16:creationId xmlns:a16="http://schemas.microsoft.com/office/drawing/2014/main" id="{D965FD72-F8C8-4747-BECB-B8D12C933CB9}"/>
+                <a16:creationId xmlns:a16="http://schemas.microsoft.com/office/drawing/2014/main" id="{AF19483E-315B-4377-B5A6-AA2C32ACDB0D}"/>
               </a:ext>
             </a:extLst>
           </p:cNvPr>
@@ -10266,7 +10274,7 @@
           <p:cNvPr id="6" name="">
             <a:extLst xmlns:a="http://schemas.openxmlformats.org/drawingml/2006/main">
               <a:ext uri="{FF2B5EF4-FFF2-40B4-BE49-F238E27FC236}">
-                <a16:creationId xmlns:a16="http://schemas.microsoft.com/office/drawing/2014/main" id="{40D8BF41-0EC9-46EF-92AE-A714E2FFC3D6}"/>
+                <a16:creationId xmlns:a16="http://schemas.microsoft.com/office/drawing/2014/main" id="{4CD6F9F7-49DB-41A1-B60B-F4CF84A80C32}"/>
               </a:ext>
             </a:extLst>
           </p:cNvPr>
@@ -10323,7 +10331,7 @@
           <p:cNvPr id="7" name="">
             <a:extLst xmlns:a="http://schemas.openxmlformats.org/drawingml/2006/main">
               <a:ext uri="{FF2B5EF4-FFF2-40B4-BE49-F238E27FC236}">
-                <a16:creationId xmlns:a16="http://schemas.microsoft.com/office/drawing/2014/main" id="{C7F29AA2-5CF4-4011-9871-3E1315F9B247}"/>
+                <a16:creationId xmlns:a16="http://schemas.microsoft.com/office/drawing/2014/main" id="{EF7CEBED-1AE5-4310-87EE-7C820435DE3F}"/>
               </a:ext>
             </a:extLst>
           </p:cNvPr>
@@ -10355,7 +10363,7 @@
           <p:cNvPr id="8" name="">
             <a:extLst xmlns:a="http://schemas.openxmlformats.org/drawingml/2006/main">
               <a:ext uri="{FF2B5EF4-FFF2-40B4-BE49-F238E27FC236}">
-                <a16:creationId xmlns:a16="http://schemas.microsoft.com/office/drawing/2014/main" id="{59459162-3D05-48B3-AEA2-1F2442542B4E}"/>
+                <a16:creationId xmlns:a16="http://schemas.microsoft.com/office/drawing/2014/main" id="{C0340836-ED36-4C62-AFE3-C68FDC6A7579}"/>
               </a:ext>
             </a:extLst>
           </p:cNvPr>
@@ -10412,7 +10420,7 @@
           <p:cNvPr id="9" name="">
             <a:extLst xmlns:a="http://schemas.openxmlformats.org/drawingml/2006/main">
               <a:ext uri="{FF2B5EF4-FFF2-40B4-BE49-F238E27FC236}">
-                <a16:creationId xmlns:a16="http://schemas.microsoft.com/office/drawing/2014/main" id="{68204B8A-DD70-4304-85D1-550CDF8AC7E0}"/>
+                <a16:creationId xmlns:a16="http://schemas.microsoft.com/office/drawing/2014/main" id="{CD0EA00A-0697-4BC4-85F1-3A05EB222049}"/>
               </a:ext>
             </a:extLst>
           </p:cNvPr>
@@ -10469,7 +10477,7 @@
           <p:cNvPr id="10" name="">
             <a:extLst xmlns:a="http://schemas.openxmlformats.org/drawingml/2006/main">
               <a:ext uri="{FF2B5EF4-FFF2-40B4-BE49-F238E27FC236}">
-                <a16:creationId xmlns:a16="http://schemas.microsoft.com/office/drawing/2014/main" id="{4970203C-1B0B-4174-A850-7294E28D2344}"/>
+                <a16:creationId xmlns:a16="http://schemas.microsoft.com/office/drawing/2014/main" id="{B80FD8CB-7721-4EA0-B7C7-87EC210AC59F}"/>
               </a:ext>
             </a:extLst>
           </p:cNvPr>
@@ -10526,7 +10534,7 @@
           <p:cNvPr id="11" name="">
             <a:extLst xmlns:a="http://schemas.openxmlformats.org/drawingml/2006/main">
               <a:ext uri="{FF2B5EF4-FFF2-40B4-BE49-F238E27FC236}">
-                <a16:creationId xmlns:a16="http://schemas.microsoft.com/office/drawing/2014/main" id="{D75938B9-B771-4375-B731-308D4DCAE72A}"/>
+                <a16:creationId xmlns:a16="http://schemas.microsoft.com/office/drawing/2014/main" id="{FF9D0830-5822-4253-879D-8DF5B6881AA3}"/>
               </a:ext>
             </a:extLst>
           </p:cNvPr>
@@ -10583,7 +10591,7 @@
           <p:cNvPr id="12" name="">
             <a:extLst xmlns:a="http://schemas.openxmlformats.org/drawingml/2006/main">
               <a:ext uri="{FF2B5EF4-FFF2-40B4-BE49-F238E27FC236}">
-                <a16:creationId xmlns:a16="http://schemas.microsoft.com/office/drawing/2014/main" id="{39690CC5-45ED-470B-9070-045BA99504BB}"/>
+                <a16:creationId xmlns:a16="http://schemas.microsoft.com/office/drawing/2014/main" id="{B9F67E74-CB48-42FA-8FE0-C59FCA4414C2}"/>
               </a:ext>
             </a:extLst>
           </p:cNvPr>
@@ -10640,7 +10648,7 @@
           <p:cNvPr id="13" name="">
             <a:extLst xmlns:a="http://schemas.openxmlformats.org/drawingml/2006/main">
               <a:ext uri="{FF2B5EF4-FFF2-40B4-BE49-F238E27FC236}">
-                <a16:creationId xmlns:a16="http://schemas.microsoft.com/office/drawing/2014/main" id="{50ABF913-E201-4F49-9911-80CC25CE4111}"/>
+                <a16:creationId xmlns:a16="http://schemas.microsoft.com/office/drawing/2014/main" id="{582C74C9-95BA-4450-9255-92029816D909}"/>
               </a:ext>
             </a:extLst>
           </p:cNvPr>
@@ -10697,7 +10705,7 @@
           <p:cNvPr id="14" name="">
             <a:extLst xmlns:a="http://schemas.openxmlformats.org/drawingml/2006/main">
               <a:ext uri="{FF2B5EF4-FFF2-40B4-BE49-F238E27FC236}">
-                <a16:creationId xmlns:a16="http://schemas.microsoft.com/office/drawing/2014/main" id="{1E182118-BA7D-4C3E-8F50-3D149090933B}"/>
+                <a16:creationId xmlns:a16="http://schemas.microsoft.com/office/drawing/2014/main" id="{9C112673-061C-4B63-AF74-89EEC8B6A811}"/>
               </a:ext>
             </a:extLst>
           </p:cNvPr>
@@ -10754,7 +10762,7 @@
           <p:cNvPr id="15" name="">
             <a:extLst xmlns:a="http://schemas.openxmlformats.org/drawingml/2006/main">
               <a:ext uri="{FF2B5EF4-FFF2-40B4-BE49-F238E27FC236}">
-                <a16:creationId xmlns:a16="http://schemas.microsoft.com/office/drawing/2014/main" id="{08A7C33E-9E29-44AA-9D0B-6DB183372660}"/>
+                <a16:creationId xmlns:a16="http://schemas.microsoft.com/office/drawing/2014/main" id="{77C6FFE7-B82E-4E91-9D84-F60B44DBAFC8}"/>
               </a:ext>
             </a:extLst>
           </p:cNvPr>
@@ -10809,7 +10817,7 @@
     </p:spTree>
     <p:extLst>
       <p:ext uri="{BB962C8B-B14F-4D97-AF65-F5344CB8AC3E}">
-        <p14:creationId xmlns:p14="http://schemas.microsoft.com/office/powerpoint/2010/main" val="1411846659"/>
+        <p14:creationId xmlns:p14="http://schemas.microsoft.com/office/powerpoint/2010/main" val="1994816068"/>
       </p:ext>
     </p:extLst>
   </p:cSld>
@@ -10964,7 +10972,7 @@
           <p:cNvPr id="16" name="">
             <a:extLst xmlns:a="http://schemas.openxmlformats.org/drawingml/2006/main">
               <a:ext uri="{FF2B5EF4-FFF2-40B4-BE49-F238E27FC236}">
-                <a16:creationId xmlns:a16="http://schemas.microsoft.com/office/drawing/2014/main" id="{9B077A5B-D7E3-4472-8A69-644E7082104A}"/>
+                <a16:creationId xmlns:a16="http://schemas.microsoft.com/office/drawing/2014/main" id="{6C57553A-9835-488B-AE42-9DE4E25A3834}"/>
               </a:ext>
             </a:extLst>
           </p:cNvPr>
@@ -10996,7 +11004,7 @@
           <p:cNvPr id="2" name="">
             <a:extLst xmlns:a="http://schemas.openxmlformats.org/drawingml/2006/main">
               <a:ext uri="{FF2B5EF4-FFF2-40B4-BE49-F238E27FC236}">
-                <a16:creationId xmlns:a16="http://schemas.microsoft.com/office/drawing/2014/main" id="{6E5F8196-8627-4243-9FA6-86D364F1A8B2}"/>
+                <a16:creationId xmlns:a16="http://schemas.microsoft.com/office/drawing/2014/main" id="{5CAE9DC1-2657-47F7-B158-DFAC2446DB0A}"/>
               </a:ext>
             </a:extLst>
           </p:cNvPr>
@@ -11053,7 +11061,7 @@
           <p:cNvPr id="3" name="">
             <a:extLst xmlns:a="http://schemas.openxmlformats.org/drawingml/2006/main">
               <a:ext uri="{FF2B5EF4-FFF2-40B4-BE49-F238E27FC236}">
-                <a16:creationId xmlns:a16="http://schemas.microsoft.com/office/drawing/2014/main" id="{6CE9F0FE-9BD6-4C68-B071-A3F2823AC839}"/>
+                <a16:creationId xmlns:a16="http://schemas.microsoft.com/office/drawing/2014/main" id="{8177C025-FC52-461E-B707-1DA0FE84E0F0}"/>
               </a:ext>
             </a:extLst>
           </p:cNvPr>
@@ -11085,7 +11093,7 @@
           <p:cNvPr id="4" name="">
             <a:extLst xmlns:a="http://schemas.openxmlformats.org/drawingml/2006/main">
               <a:ext uri="{FF2B5EF4-FFF2-40B4-BE49-F238E27FC236}">
-                <a16:creationId xmlns:a16="http://schemas.microsoft.com/office/drawing/2014/main" id="{E4938974-0186-4B7A-9E02-78150D4B161F}"/>
+                <a16:creationId xmlns:a16="http://schemas.microsoft.com/office/drawing/2014/main" id="{33E56ABF-0957-440E-B089-80B421D1AECF}"/>
               </a:ext>
             </a:extLst>
           </p:cNvPr>
@@ -11142,7 +11150,7 @@
           <p:cNvPr id="5" name="">
             <a:extLst xmlns:a="http://schemas.openxmlformats.org/drawingml/2006/main">
               <a:ext uri="{FF2B5EF4-FFF2-40B4-BE49-F238E27FC236}">
-                <a16:creationId xmlns:a16="http://schemas.microsoft.com/office/drawing/2014/main" id="{119F5860-63A6-4073-BC15-4F9F03A0F9A1}"/>
+                <a16:creationId xmlns:a16="http://schemas.microsoft.com/office/drawing/2014/main" id="{6FDB5D47-DF8E-43F6-8D4E-6508F3AE0D09}"/>
               </a:ext>
             </a:extLst>
           </p:cNvPr>
@@ -11199,7 +11207,7 @@
           <p:cNvPr id="6" name="">
             <a:extLst xmlns:a="http://schemas.openxmlformats.org/drawingml/2006/main">
               <a:ext uri="{FF2B5EF4-FFF2-40B4-BE49-F238E27FC236}">
-                <a16:creationId xmlns:a16="http://schemas.microsoft.com/office/drawing/2014/main" id="{BAF65441-D2CF-4C07-96C6-4DC6488186BE}"/>
+                <a16:creationId xmlns:a16="http://schemas.microsoft.com/office/drawing/2014/main" id="{0E31F1B8-4B3E-4CAD-B989-3B31B1ABBAF6}"/>
               </a:ext>
             </a:extLst>
           </p:cNvPr>
@@ -11256,7 +11264,7 @@
           <p:cNvPr id="7" name="">
             <a:extLst xmlns:a="http://schemas.openxmlformats.org/drawingml/2006/main">
               <a:ext uri="{FF2B5EF4-FFF2-40B4-BE49-F238E27FC236}">
-                <a16:creationId xmlns:a16="http://schemas.microsoft.com/office/drawing/2014/main" id="{E61D7D31-D6B7-4CD5-A3FD-03E5E0AC5395}"/>
+                <a16:creationId xmlns:a16="http://schemas.microsoft.com/office/drawing/2014/main" id="{3605BAD8-2917-4176-B27E-43CA287D29DC}"/>
               </a:ext>
             </a:extLst>
           </p:cNvPr>
@@ -11288,7 +11296,7 @@
           <p:cNvPr id="8" name="">
             <a:extLst xmlns:a="http://schemas.openxmlformats.org/drawingml/2006/main">
               <a:ext uri="{FF2B5EF4-FFF2-40B4-BE49-F238E27FC236}">
-                <a16:creationId xmlns:a16="http://schemas.microsoft.com/office/drawing/2014/main" id="{54DC68C6-5335-4E09-8F35-D0DBD86B0464}"/>
+                <a16:creationId xmlns:a16="http://schemas.microsoft.com/office/drawing/2014/main" id="{D45F417F-4AF4-4BF5-9E33-AD51E73E76F9}"/>
               </a:ext>
             </a:extLst>
           </p:cNvPr>
@@ -11345,7 +11353,7 @@
           <p:cNvPr id="9" name="">
             <a:extLst xmlns:a="http://schemas.openxmlformats.org/drawingml/2006/main">
               <a:ext uri="{FF2B5EF4-FFF2-40B4-BE49-F238E27FC236}">
-                <a16:creationId xmlns:a16="http://schemas.microsoft.com/office/drawing/2014/main" id="{E104ABC9-DB01-4C82-B0BD-5C58081E96BF}"/>
+                <a16:creationId xmlns:a16="http://schemas.microsoft.com/office/drawing/2014/main" id="{71D05B25-2691-4D24-8EA7-821A2061118A}"/>
               </a:ext>
             </a:extLst>
           </p:cNvPr>
@@ -11406,7 +11414,7 @@
           <p:nvPr/>
         </p:nvPicPr>
         <p:blipFill>
-          <a:blip xmlns:r="http://schemas.openxmlformats.org/officeDocument/2006/relationships" xmlns:a="http://schemas.openxmlformats.org/drawingml/2006/main" r:embed="Re7a17d6bc8f64173"/>
+          <a:blip xmlns:r="http://schemas.openxmlformats.org/officeDocument/2006/relationships" xmlns:a="http://schemas.openxmlformats.org/drawingml/2006/main" r:embed="R65c2a987f6b74a21"/>
           <a:stretch xmlns:a="http://schemas.openxmlformats.org/drawingml/2006/main"/>
         </p:blipFill>
         <p:spPr>
@@ -11424,7 +11432,7 @@
           <p:cNvPr id="11" name="">
             <a:extLst xmlns:a="http://schemas.openxmlformats.org/drawingml/2006/main">
               <a:ext uri="{FF2B5EF4-FFF2-40B4-BE49-F238E27FC236}">
-                <a16:creationId xmlns:a16="http://schemas.microsoft.com/office/drawing/2014/main" id="{4CD3845F-C0C4-463B-8551-5921E5663DD5}"/>
+                <a16:creationId xmlns:a16="http://schemas.microsoft.com/office/drawing/2014/main" id="{16DE7C12-8E98-4469-87C7-D924821D51E5}"/>
               </a:ext>
             </a:extLst>
           </p:cNvPr>
@@ -11481,7 +11489,7 @@
           <p:cNvPr id="12" name="">
             <a:extLst xmlns:a="http://schemas.openxmlformats.org/drawingml/2006/main">
               <a:ext uri="{FF2B5EF4-FFF2-40B4-BE49-F238E27FC236}">
-                <a16:creationId xmlns:a16="http://schemas.microsoft.com/office/drawing/2014/main" id="{B7D05033-20E3-4060-BF08-28A47E90C9F7}"/>
+                <a16:creationId xmlns:a16="http://schemas.microsoft.com/office/drawing/2014/main" id="{0137872B-9992-4660-ACD3-8FCEF4AA5D9A}"/>
               </a:ext>
             </a:extLst>
           </p:cNvPr>
@@ -11538,7 +11546,7 @@
           <p:cNvPr id="13" name="">
             <a:extLst xmlns:a="http://schemas.openxmlformats.org/drawingml/2006/main">
               <a:ext uri="{FF2B5EF4-FFF2-40B4-BE49-F238E27FC236}">
-                <a16:creationId xmlns:a16="http://schemas.microsoft.com/office/drawing/2014/main" id="{37FFAF5F-7D38-4B0B-94E7-0DAAD783B384}"/>
+                <a16:creationId xmlns:a16="http://schemas.microsoft.com/office/drawing/2014/main" id="{CE9D9E16-5B6C-4718-AD25-C9C637916C9E}"/>
               </a:ext>
             </a:extLst>
           </p:cNvPr>
@@ -11570,7 +11578,7 @@
           <p:cNvPr id="14" name="">
             <a:extLst xmlns:a="http://schemas.openxmlformats.org/drawingml/2006/main">
               <a:ext uri="{FF2B5EF4-FFF2-40B4-BE49-F238E27FC236}">
-                <a16:creationId xmlns:a16="http://schemas.microsoft.com/office/drawing/2014/main" id="{F5F5A385-3DCF-417B-A27F-D89926779429}"/>
+                <a16:creationId xmlns:a16="http://schemas.microsoft.com/office/drawing/2014/main" id="{7F95FE9B-5518-4837-979C-FA7E4C7C1385}"/>
               </a:ext>
             </a:extLst>
           </p:cNvPr>
@@ -11627,7 +11635,7 @@
           <p:cNvPr id="15" name="">
             <a:extLst xmlns:a="http://schemas.openxmlformats.org/drawingml/2006/main">
               <a:ext uri="{FF2B5EF4-FFF2-40B4-BE49-F238E27FC236}">
-                <a16:creationId xmlns:a16="http://schemas.microsoft.com/office/drawing/2014/main" id="{96623A37-9169-467F-A4BD-42EF8B4F665A}"/>
+                <a16:creationId xmlns:a16="http://schemas.microsoft.com/office/drawing/2014/main" id="{AF750C2D-9B5E-4946-AFA2-B88CD9F4DE4F}"/>
               </a:ext>
             </a:extLst>
           </p:cNvPr>
@@ -11682,7 +11690,7 @@
     </p:spTree>
     <p:extLst>
       <p:ext uri="{BB962C8B-B14F-4D97-AF65-F5344CB8AC3E}">
-        <p14:creationId xmlns:p14="http://schemas.microsoft.com/office/powerpoint/2010/main" val="376277863"/>
+        <p14:creationId xmlns:p14="http://schemas.microsoft.com/office/powerpoint/2010/main" val="2071422304"/>
       </p:ext>
     </p:extLst>
   </p:cSld>
@@ -11837,7 +11845,7 @@
           <p:cNvPr id="23" name="">
             <a:extLst xmlns:a="http://schemas.openxmlformats.org/drawingml/2006/main">
               <a:ext uri="{FF2B5EF4-FFF2-40B4-BE49-F238E27FC236}">
-                <a16:creationId xmlns:a16="http://schemas.microsoft.com/office/drawing/2014/main" id="{58E4E721-03EC-48EE-AB6B-39D1D3B4BE9B}"/>
+                <a16:creationId xmlns:a16="http://schemas.microsoft.com/office/drawing/2014/main" id="{2ADE14E7-601C-4981-85AE-F62902BC87B0}"/>
               </a:ext>
             </a:extLst>
           </p:cNvPr>
@@ -11869,7 +11877,7 @@
           <p:cNvPr id="2" name="">
             <a:extLst xmlns:a="http://schemas.openxmlformats.org/drawingml/2006/main">
               <a:ext uri="{FF2B5EF4-FFF2-40B4-BE49-F238E27FC236}">
-                <a16:creationId xmlns:a16="http://schemas.microsoft.com/office/drawing/2014/main" id="{1DD298E2-4B4C-49FB-93C2-F73F6D744B86}"/>
+                <a16:creationId xmlns:a16="http://schemas.microsoft.com/office/drawing/2014/main" id="{70234CD7-6C36-401B-9957-175EDFB617BE}"/>
               </a:ext>
             </a:extLst>
           </p:cNvPr>
@@ -11926,7 +11934,7 @@
           <p:cNvPr id="3" name="">
             <a:extLst xmlns:a="http://schemas.openxmlformats.org/drawingml/2006/main">
               <a:ext uri="{FF2B5EF4-FFF2-40B4-BE49-F238E27FC236}">
-                <a16:creationId xmlns:a16="http://schemas.microsoft.com/office/drawing/2014/main" id="{9003CA04-872E-4864-9035-8E1CFB37A14F}"/>
+                <a16:creationId xmlns:a16="http://schemas.microsoft.com/office/drawing/2014/main" id="{7F45ED13-5913-471A-8473-1402464E915F}"/>
               </a:ext>
             </a:extLst>
           </p:cNvPr>
@@ -11958,7 +11966,7 @@
           <p:cNvPr id="4" name="">
             <a:extLst xmlns:a="http://schemas.openxmlformats.org/drawingml/2006/main">
               <a:ext uri="{FF2B5EF4-FFF2-40B4-BE49-F238E27FC236}">
-                <a16:creationId xmlns:a16="http://schemas.microsoft.com/office/drawing/2014/main" id="{9CFD1B87-0F00-47A6-B65F-2E4BBA492690}"/>
+                <a16:creationId xmlns:a16="http://schemas.microsoft.com/office/drawing/2014/main" id="{9A4F2964-7F8B-4827-B0A6-BC5B3D02BC9C}"/>
               </a:ext>
             </a:extLst>
           </p:cNvPr>
@@ -12015,7 +12023,7 @@
           <p:cNvPr id="5" name="">
             <a:extLst xmlns:a="http://schemas.openxmlformats.org/drawingml/2006/main">
               <a:ext uri="{FF2B5EF4-FFF2-40B4-BE49-F238E27FC236}">
-                <a16:creationId xmlns:a16="http://schemas.microsoft.com/office/drawing/2014/main" id="{6568007A-77B2-4488-A8CA-A771691ED737}"/>
+                <a16:creationId xmlns:a16="http://schemas.microsoft.com/office/drawing/2014/main" id="{A4B49D2E-88CE-4ADC-8C83-B49B0BF1D5B2}"/>
               </a:ext>
             </a:extLst>
           </p:cNvPr>
@@ -12072,7 +12080,7 @@
           <p:cNvPr id="6" name="">
             <a:extLst xmlns:a="http://schemas.openxmlformats.org/drawingml/2006/main">
               <a:ext uri="{FF2B5EF4-FFF2-40B4-BE49-F238E27FC236}">
-                <a16:creationId xmlns:a16="http://schemas.microsoft.com/office/drawing/2014/main" id="{115C3E9A-43DE-41F5-A8D4-F10994B3E2C8}"/>
+                <a16:creationId xmlns:a16="http://schemas.microsoft.com/office/drawing/2014/main" id="{84A12A83-1B96-4F38-883A-36B63CE618DF}"/>
               </a:ext>
             </a:extLst>
           </p:cNvPr>
@@ -12129,7 +12137,7 @@
           <p:cNvPr id="7" name="">
             <a:extLst xmlns:a="http://schemas.openxmlformats.org/drawingml/2006/main">
               <a:ext uri="{FF2B5EF4-FFF2-40B4-BE49-F238E27FC236}">
-                <a16:creationId xmlns:a16="http://schemas.microsoft.com/office/drawing/2014/main" id="{2F2A335C-BC89-4586-A38E-0E7A95B420A0}"/>
+                <a16:creationId xmlns:a16="http://schemas.microsoft.com/office/drawing/2014/main" id="{24E00FD2-A722-4CD5-B866-DDFBA9CE1238}"/>
               </a:ext>
             </a:extLst>
           </p:cNvPr>
@@ -12161,7 +12169,7 @@
           <p:cNvPr id="8" name="">
             <a:extLst xmlns:a="http://schemas.openxmlformats.org/drawingml/2006/main">
               <a:ext uri="{FF2B5EF4-FFF2-40B4-BE49-F238E27FC236}">
-                <a16:creationId xmlns:a16="http://schemas.microsoft.com/office/drawing/2014/main" id="{DDBBB380-2AEE-493E-9CD1-E0F844C7EB94}"/>
+                <a16:creationId xmlns:a16="http://schemas.microsoft.com/office/drawing/2014/main" id="{7558E53C-1246-4249-AC1B-B51A15978964}"/>
               </a:ext>
             </a:extLst>
           </p:cNvPr>
@@ -12218,7 +12226,7 @@
           <p:cNvPr id="9" name="">
             <a:extLst xmlns:a="http://schemas.openxmlformats.org/drawingml/2006/main">
               <a:ext uri="{FF2B5EF4-FFF2-40B4-BE49-F238E27FC236}">
-                <a16:creationId xmlns:a16="http://schemas.microsoft.com/office/drawing/2014/main" id="{A1A6891E-F820-4AA9-BACC-4B2E3B7A44D7}"/>
+                <a16:creationId xmlns:a16="http://schemas.microsoft.com/office/drawing/2014/main" id="{EC746742-7F61-4A07-876F-D407F89C1CFB}"/>
               </a:ext>
             </a:extLst>
           </p:cNvPr>
@@ -12275,7 +12283,7 @@
           <p:cNvPr id="10" name="">
             <a:extLst xmlns:a="http://schemas.openxmlformats.org/drawingml/2006/main">
               <a:ext uri="{FF2B5EF4-FFF2-40B4-BE49-F238E27FC236}">
-                <a16:creationId xmlns:a16="http://schemas.microsoft.com/office/drawing/2014/main" id="{294BA6F2-6E87-4963-9D4E-FEE12F3B8A94}"/>
+                <a16:creationId xmlns:a16="http://schemas.microsoft.com/office/drawing/2014/main" id="{177037DA-084D-4852-8576-E1CD71DCFB3A}"/>
               </a:ext>
             </a:extLst>
           </p:cNvPr>
@@ -12309,7 +12317,7 @@
           <p:cNvPr id="11" name="">
             <a:extLst xmlns:a="http://schemas.openxmlformats.org/drawingml/2006/main">
               <a:ext uri="{FF2B5EF4-FFF2-40B4-BE49-F238E27FC236}">
-                <a16:creationId xmlns:a16="http://schemas.microsoft.com/office/drawing/2014/main" id="{E9F6CF04-EB56-4459-92BB-998A9F6D5A0A}"/>
+                <a16:creationId xmlns:a16="http://schemas.microsoft.com/office/drawing/2014/main" id="{4A409D01-00D2-47E1-AB43-1801122745CA}"/>
               </a:ext>
             </a:extLst>
           </p:cNvPr>
@@ -12341,7 +12349,7 @@
           <p:cNvPr id="12" name="">
             <a:extLst xmlns:a="http://schemas.openxmlformats.org/drawingml/2006/main">
               <a:ext uri="{FF2B5EF4-FFF2-40B4-BE49-F238E27FC236}">
-                <a16:creationId xmlns:a16="http://schemas.microsoft.com/office/drawing/2014/main" id="{14F170F1-9817-475C-9FF7-5DBF80937FA1}"/>
+                <a16:creationId xmlns:a16="http://schemas.microsoft.com/office/drawing/2014/main" id="{7A07FAEC-5350-4CA5-94DD-90A3E175F62B}"/>
               </a:ext>
             </a:extLst>
           </p:cNvPr>
@@ -12398,7 +12406,7 @@
           <p:cNvPr id="13" name="">
             <a:extLst xmlns:a="http://schemas.openxmlformats.org/drawingml/2006/main">
               <a:ext uri="{FF2B5EF4-FFF2-40B4-BE49-F238E27FC236}">
-                <a16:creationId xmlns:a16="http://schemas.microsoft.com/office/drawing/2014/main" id="{B04D4883-004A-4428-AD6F-32B0C1BB8DFF}"/>
+                <a16:creationId xmlns:a16="http://schemas.microsoft.com/office/drawing/2014/main" id="{05D6C8A2-A777-4885-A71C-E3897C072E9B}"/>
               </a:ext>
             </a:extLst>
           </p:cNvPr>
@@ -12455,7 +12463,7 @@
           <p:cNvPr id="14" name="">
             <a:extLst xmlns:a="http://schemas.openxmlformats.org/drawingml/2006/main">
               <a:ext uri="{FF2B5EF4-FFF2-40B4-BE49-F238E27FC236}">
-                <a16:creationId xmlns:a16="http://schemas.microsoft.com/office/drawing/2014/main" id="{4650F14F-98E9-4F31-A473-EA9CE9D60FEB}"/>
+                <a16:creationId xmlns:a16="http://schemas.microsoft.com/office/drawing/2014/main" id="{10271019-C436-44E7-BB35-EE54DC2B9C65}"/>
               </a:ext>
             </a:extLst>
           </p:cNvPr>
@@ -12489,7 +12497,7 @@
           <p:cNvPr id="15" name="">
             <a:extLst xmlns:a="http://schemas.openxmlformats.org/drawingml/2006/main">
               <a:ext uri="{FF2B5EF4-FFF2-40B4-BE49-F238E27FC236}">
-                <a16:creationId xmlns:a16="http://schemas.microsoft.com/office/drawing/2014/main" id="{AEDC0DCA-16F5-4940-9138-67B997DD15AC}"/>
+                <a16:creationId xmlns:a16="http://schemas.microsoft.com/office/drawing/2014/main" id="{624DC191-AF7F-406A-B383-05AC8C58AFFA}"/>
               </a:ext>
             </a:extLst>
           </p:cNvPr>
@@ -12521,7 +12529,7 @@
           <p:cNvPr id="16" name="">
             <a:extLst xmlns:a="http://schemas.openxmlformats.org/drawingml/2006/main">
               <a:ext uri="{FF2B5EF4-FFF2-40B4-BE49-F238E27FC236}">
-                <a16:creationId xmlns:a16="http://schemas.microsoft.com/office/drawing/2014/main" id="{6C371189-067A-4530-ACD2-62B08A358406}"/>
+                <a16:creationId xmlns:a16="http://schemas.microsoft.com/office/drawing/2014/main" id="{14B30A71-34F3-4535-91E0-DC18AB8747DB}"/>
               </a:ext>
             </a:extLst>
           </p:cNvPr>
@@ -12578,7 +12586,7 @@
           <p:cNvPr id="17" name="">
             <a:extLst xmlns:a="http://schemas.openxmlformats.org/drawingml/2006/main">
               <a:ext uri="{FF2B5EF4-FFF2-40B4-BE49-F238E27FC236}">
-                <a16:creationId xmlns:a16="http://schemas.microsoft.com/office/drawing/2014/main" id="{413DC26E-F716-4C0C-86D0-E7DB23DE76B1}"/>
+                <a16:creationId xmlns:a16="http://schemas.microsoft.com/office/drawing/2014/main" id="{7C61D635-3A13-4630-8E5A-9B32E3D0E4A1}"/>
               </a:ext>
             </a:extLst>
           </p:cNvPr>
@@ -12635,7 +12643,7 @@
           <p:cNvPr id="18" name="">
             <a:extLst xmlns:a="http://schemas.openxmlformats.org/drawingml/2006/main">
               <a:ext uri="{FF2B5EF4-FFF2-40B4-BE49-F238E27FC236}">
-                <a16:creationId xmlns:a16="http://schemas.microsoft.com/office/drawing/2014/main" id="{AA6C5DA1-9DCF-4B7C-9BF3-2E4EBEC57CA6}"/>
+                <a16:creationId xmlns:a16="http://schemas.microsoft.com/office/drawing/2014/main" id="{491F5CFD-B446-43FA-A965-2354547930FF}"/>
               </a:ext>
             </a:extLst>
           </p:cNvPr>
@@ -12669,7 +12677,7 @@
           <p:cNvPr id="19" name="">
             <a:extLst xmlns:a="http://schemas.openxmlformats.org/drawingml/2006/main">
               <a:ext uri="{FF2B5EF4-FFF2-40B4-BE49-F238E27FC236}">
-                <a16:creationId xmlns:a16="http://schemas.microsoft.com/office/drawing/2014/main" id="{C59D09B0-CEBF-40DC-A230-0FD406D16C46}"/>
+                <a16:creationId xmlns:a16="http://schemas.microsoft.com/office/drawing/2014/main" id="{88758F04-7084-4399-B671-A76206DD66D5}"/>
               </a:ext>
             </a:extLst>
           </p:cNvPr>
@@ -12701,7 +12709,7 @@
           <p:cNvPr id="20" name="">
             <a:extLst xmlns:a="http://schemas.openxmlformats.org/drawingml/2006/main">
               <a:ext uri="{FF2B5EF4-FFF2-40B4-BE49-F238E27FC236}">
-                <a16:creationId xmlns:a16="http://schemas.microsoft.com/office/drawing/2014/main" id="{2016F010-822E-4956-BF24-05DAD45639A1}"/>
+                <a16:creationId xmlns:a16="http://schemas.microsoft.com/office/drawing/2014/main" id="{AA71D608-989E-46A3-AE94-4D3C56265CD3}"/>
               </a:ext>
             </a:extLst>
           </p:cNvPr>
@@ -12758,7 +12766,7 @@
           <p:cNvPr id="21" name="">
             <a:extLst xmlns:a="http://schemas.openxmlformats.org/drawingml/2006/main">
               <a:ext uri="{FF2B5EF4-FFF2-40B4-BE49-F238E27FC236}">
-                <a16:creationId xmlns:a16="http://schemas.microsoft.com/office/drawing/2014/main" id="{63418053-A17B-4342-81F2-E5D0757E050C}"/>
+                <a16:creationId xmlns:a16="http://schemas.microsoft.com/office/drawing/2014/main" id="{AA5C016C-D879-48A3-92FD-08FA49A05C35}"/>
               </a:ext>
             </a:extLst>
           </p:cNvPr>
@@ -12815,7 +12823,7 @@
           <p:cNvPr id="22" name="">
             <a:extLst xmlns:a="http://schemas.openxmlformats.org/drawingml/2006/main">
               <a:ext uri="{FF2B5EF4-FFF2-40B4-BE49-F238E27FC236}">
-                <a16:creationId xmlns:a16="http://schemas.microsoft.com/office/drawing/2014/main" id="{FE612A2F-E2AB-49A7-8BD9-944B2719148F}"/>
+                <a16:creationId xmlns:a16="http://schemas.microsoft.com/office/drawing/2014/main" id="{CCC9B6E9-0CCD-4CFA-A2AE-88EBBE601D1F}"/>
               </a:ext>
             </a:extLst>
           </p:cNvPr>
@@ -12870,7 +12878,7 @@
     </p:spTree>
     <p:extLst>
       <p:ext uri="{BB962C8B-B14F-4D97-AF65-F5344CB8AC3E}">
-        <p14:creationId xmlns:p14="http://schemas.microsoft.com/office/powerpoint/2010/main" val="1048672761"/>
+        <p14:creationId xmlns:p14="http://schemas.microsoft.com/office/powerpoint/2010/main" val="478871073"/>
       </p:ext>
     </p:extLst>
   </p:cSld>
@@ -13071,7 +13079,7 @@
           <p:cNvPr id="22" name="">
             <a:extLst xmlns:a="http://schemas.openxmlformats.org/drawingml/2006/main">
               <a:ext uri="{FF2B5EF4-FFF2-40B4-BE49-F238E27FC236}">
-                <a16:creationId xmlns:a16="http://schemas.microsoft.com/office/drawing/2014/main" id="{A0B5A90D-E753-4438-BFA6-B76C1C19A527}"/>
+                <a16:creationId xmlns:a16="http://schemas.microsoft.com/office/drawing/2014/main" id="{9D5268F8-4657-403F-AAE7-6A45E8DC65A7}"/>
               </a:ext>
             </a:extLst>
           </p:cNvPr>
@@ -13103,7 +13111,7 @@
           <p:cNvPr id="2" name="">
             <a:extLst xmlns:a="http://schemas.openxmlformats.org/drawingml/2006/main">
               <a:ext uri="{FF2B5EF4-FFF2-40B4-BE49-F238E27FC236}">
-                <a16:creationId xmlns:a16="http://schemas.microsoft.com/office/drawing/2014/main" id="{A1A6F132-384B-4466-9A7C-5F5E6FA3A9A6}"/>
+                <a16:creationId xmlns:a16="http://schemas.microsoft.com/office/drawing/2014/main" id="{6B57533E-7B8B-4817-A1AB-E56A0B1B4FD0}"/>
               </a:ext>
             </a:extLst>
           </p:cNvPr>
@@ -13160,7 +13168,7 @@
           <p:cNvPr id="3" name="">
             <a:extLst xmlns:a="http://schemas.openxmlformats.org/drawingml/2006/main">
               <a:ext uri="{FF2B5EF4-FFF2-40B4-BE49-F238E27FC236}">
-                <a16:creationId xmlns:a16="http://schemas.microsoft.com/office/drawing/2014/main" id="{BB8CDAFA-C6EB-4959-BC3B-FA9BC080D9E0}"/>
+                <a16:creationId xmlns:a16="http://schemas.microsoft.com/office/drawing/2014/main" id="{79A01C9B-F157-4F34-A73E-F8C7BB8AD6C7}"/>
               </a:ext>
             </a:extLst>
           </p:cNvPr>
@@ -13192,7 +13200,7 @@
           <p:cNvPr id="4" name="">
             <a:extLst xmlns:a="http://schemas.openxmlformats.org/drawingml/2006/main">
               <a:ext uri="{FF2B5EF4-FFF2-40B4-BE49-F238E27FC236}">
-                <a16:creationId xmlns:a16="http://schemas.microsoft.com/office/drawing/2014/main" id="{C29014F6-3C4E-4F18-905E-686BCCBE1C93}"/>
+                <a16:creationId xmlns:a16="http://schemas.microsoft.com/office/drawing/2014/main" id="{09D6904D-34BE-445B-BD0A-7E9F1237E6D5}"/>
               </a:ext>
             </a:extLst>
           </p:cNvPr>
@@ -13249,7 +13257,7 @@
           <p:cNvPr id="5" name="">
             <a:extLst xmlns:a="http://schemas.openxmlformats.org/drawingml/2006/main">
               <a:ext uri="{FF2B5EF4-FFF2-40B4-BE49-F238E27FC236}">
-                <a16:creationId xmlns:a16="http://schemas.microsoft.com/office/drawing/2014/main" id="{6BD40F16-C7BD-4C74-AE4F-D88511368E92}"/>
+                <a16:creationId xmlns:a16="http://schemas.microsoft.com/office/drawing/2014/main" id="{32B937C5-E6DD-4298-9854-577C0FC03DFE}"/>
               </a:ext>
             </a:extLst>
           </p:cNvPr>
@@ -13306,7 +13314,7 @@
           <p:cNvPr id="6" name="">
             <a:extLst xmlns:a="http://schemas.openxmlformats.org/drawingml/2006/main">
               <a:ext uri="{FF2B5EF4-FFF2-40B4-BE49-F238E27FC236}">
-                <a16:creationId xmlns:a16="http://schemas.microsoft.com/office/drawing/2014/main" id="{16AD67F9-54C9-48D4-A87D-1A462E11BD79}"/>
+                <a16:creationId xmlns:a16="http://schemas.microsoft.com/office/drawing/2014/main" id="{4569E502-546C-43A5-BEDE-EA56833AA48A}"/>
               </a:ext>
             </a:extLst>
           </p:cNvPr>
@@ -13363,7 +13371,7 @@
           <p:cNvPr id="7" name="">
             <a:extLst xmlns:a="http://schemas.openxmlformats.org/drawingml/2006/main">
               <a:ext uri="{FF2B5EF4-FFF2-40B4-BE49-F238E27FC236}">
-                <a16:creationId xmlns:a16="http://schemas.microsoft.com/office/drawing/2014/main" id="{C4E72582-0BA3-4AD9-9130-28F66D8D76A0}"/>
+                <a16:creationId xmlns:a16="http://schemas.microsoft.com/office/drawing/2014/main" id="{16C99509-18EC-46E0-B9CA-D6291A671321}"/>
               </a:ext>
             </a:extLst>
           </p:cNvPr>
@@ -13395,7 +13403,7 @@
           <p:cNvPr id="8" name="">
             <a:extLst xmlns:a="http://schemas.openxmlformats.org/drawingml/2006/main">
               <a:ext uri="{FF2B5EF4-FFF2-40B4-BE49-F238E27FC236}">
-                <a16:creationId xmlns:a16="http://schemas.microsoft.com/office/drawing/2014/main" id="{E9A45019-F525-4B75-B5ED-49F350784FF4}"/>
+                <a16:creationId xmlns:a16="http://schemas.microsoft.com/office/drawing/2014/main" id="{D60AA3E6-6DC5-4AF6-9B42-894BA525D19A}"/>
               </a:ext>
             </a:extLst>
           </p:cNvPr>
@@ -13452,7 +13460,7 @@
           <p:cNvPr id="9" name="">
             <a:extLst xmlns:a="http://schemas.openxmlformats.org/drawingml/2006/main">
               <a:ext uri="{FF2B5EF4-FFF2-40B4-BE49-F238E27FC236}">
-                <a16:creationId xmlns:a16="http://schemas.microsoft.com/office/drawing/2014/main" id="{7693BC2E-BFE0-4D61-84CF-8E1BFA29C506}"/>
+                <a16:creationId xmlns:a16="http://schemas.microsoft.com/office/drawing/2014/main" id="{5E82EEE7-D7EF-4136-A1A7-7FD4F4C04A90}"/>
               </a:ext>
             </a:extLst>
           </p:cNvPr>
@@ -13509,7 +13517,7 @@
           <p:cNvPr id="10" name="">
             <a:extLst xmlns:a="http://schemas.openxmlformats.org/drawingml/2006/main">
               <a:ext uri="{FF2B5EF4-FFF2-40B4-BE49-F238E27FC236}">
-                <a16:creationId xmlns:a16="http://schemas.microsoft.com/office/drawing/2014/main" id="{0FAB7594-6F72-4065-9B46-14557322DED9}"/>
+                <a16:creationId xmlns:a16="http://schemas.microsoft.com/office/drawing/2014/main" id="{969FECB5-6B73-47D4-9E72-EFEF194B62D2}"/>
               </a:ext>
             </a:extLst>
           </p:cNvPr>
@@ -13543,7 +13551,7 @@
           <p:cNvPr id="11" name="">
             <a:extLst xmlns:a="http://schemas.openxmlformats.org/drawingml/2006/main">
               <a:ext uri="{FF2B5EF4-FFF2-40B4-BE49-F238E27FC236}">
-                <a16:creationId xmlns:a16="http://schemas.microsoft.com/office/drawing/2014/main" id="{699EF706-5314-4908-8706-10DA8797DECA}"/>
+                <a16:creationId xmlns:a16="http://schemas.microsoft.com/office/drawing/2014/main" id="{2BF173B8-E21F-4866-949B-1A72181CA351}"/>
               </a:ext>
             </a:extLst>
           </p:cNvPr>
@@ -13575,7 +13583,7 @@
           <p:cNvPr id="12" name="">
             <a:extLst xmlns:a="http://schemas.openxmlformats.org/drawingml/2006/main">
               <a:ext uri="{FF2B5EF4-FFF2-40B4-BE49-F238E27FC236}">
-                <a16:creationId xmlns:a16="http://schemas.microsoft.com/office/drawing/2014/main" id="{E1FE1FA0-231E-46CF-852A-928A97D1BC1D}"/>
+                <a16:creationId xmlns:a16="http://schemas.microsoft.com/office/drawing/2014/main" id="{171E6965-2058-403F-9982-DEF5585D3E20}"/>
               </a:ext>
             </a:extLst>
           </p:cNvPr>
@@ -13632,7 +13640,7 @@
           <p:cNvPr id="13" name="">
             <a:extLst xmlns:a="http://schemas.openxmlformats.org/drawingml/2006/main">
               <a:ext uri="{FF2B5EF4-FFF2-40B4-BE49-F238E27FC236}">
-                <a16:creationId xmlns:a16="http://schemas.microsoft.com/office/drawing/2014/main" id="{AAA53965-48E4-4DFB-8899-035E646C6F45}"/>
+                <a16:creationId xmlns:a16="http://schemas.microsoft.com/office/drawing/2014/main" id="{533177CB-1D0B-49FB-A87B-CE7DAB2E8701}"/>
               </a:ext>
             </a:extLst>
           </p:cNvPr>
@@ -13689,7 +13697,7 @@
           <p:cNvPr id="14" name="">
             <a:extLst xmlns:a="http://schemas.openxmlformats.org/drawingml/2006/main">
               <a:ext uri="{FF2B5EF4-FFF2-40B4-BE49-F238E27FC236}">
-                <a16:creationId xmlns:a16="http://schemas.microsoft.com/office/drawing/2014/main" id="{8CE6AB72-A6C7-478E-BDDA-56ED33A6EFFB}"/>
+                <a16:creationId xmlns:a16="http://schemas.microsoft.com/office/drawing/2014/main" id="{0919F2AB-CEAE-42C4-9643-F44AB04EB9C1}"/>
               </a:ext>
             </a:extLst>
           </p:cNvPr>
@@ -13723,7 +13731,7 @@
           <p:cNvPr id="15" name="">
             <a:extLst xmlns:a="http://schemas.openxmlformats.org/drawingml/2006/main">
               <a:ext uri="{FF2B5EF4-FFF2-40B4-BE49-F238E27FC236}">
-                <a16:creationId xmlns:a16="http://schemas.microsoft.com/office/drawing/2014/main" id="{C8F8044D-69FF-44D6-860D-D4769D7F0585}"/>
+                <a16:creationId xmlns:a16="http://schemas.microsoft.com/office/drawing/2014/main" id="{D6DDC997-DEEC-4DA1-A2F5-2FB1E79D5660}"/>
               </a:ext>
             </a:extLst>
           </p:cNvPr>
@@ -13755,7 +13763,7 @@
           <p:cNvPr id="16" name="">
             <a:extLst xmlns:a="http://schemas.openxmlformats.org/drawingml/2006/main">
               <a:ext uri="{FF2B5EF4-FFF2-40B4-BE49-F238E27FC236}">
-                <a16:creationId xmlns:a16="http://schemas.microsoft.com/office/drawing/2014/main" id="{7D8D997D-5C05-420A-B984-0995EDC5840F}"/>
+                <a16:creationId xmlns:a16="http://schemas.microsoft.com/office/drawing/2014/main" id="{F0B198CC-256A-4D6B-8019-01FF80A34677}"/>
               </a:ext>
             </a:extLst>
           </p:cNvPr>
@@ -13812,7 +13820,7 @@
           <p:cNvPr id="17" name="">
             <a:extLst xmlns:a="http://schemas.openxmlformats.org/drawingml/2006/main">
               <a:ext uri="{FF2B5EF4-FFF2-40B4-BE49-F238E27FC236}">
-                <a16:creationId xmlns:a16="http://schemas.microsoft.com/office/drawing/2014/main" id="{39DD8D3F-B19B-474C-945C-B77381673643}"/>
+                <a16:creationId xmlns:a16="http://schemas.microsoft.com/office/drawing/2014/main" id="{63171307-0985-4253-97C4-DECDEC6D73C2}"/>
               </a:ext>
             </a:extLst>
           </p:cNvPr>
@@ -13869,7 +13877,7 @@
           <p:cNvPr id="18" name="">
             <a:extLst xmlns:a="http://schemas.openxmlformats.org/drawingml/2006/main">
               <a:ext uri="{FF2B5EF4-FFF2-40B4-BE49-F238E27FC236}">
-                <a16:creationId xmlns:a16="http://schemas.microsoft.com/office/drawing/2014/main" id="{2796D154-B64F-4C30-8E6D-C847477F9DA5}"/>
+                <a16:creationId xmlns:a16="http://schemas.microsoft.com/office/drawing/2014/main" id="{C2A96B0C-A8E7-4AA0-A955-E2C9276340A4}"/>
               </a:ext>
             </a:extLst>
           </p:cNvPr>
@@ -13903,7 +13911,7 @@
           <p:cNvPr id="19" name="">
             <a:extLst xmlns:a="http://schemas.openxmlformats.org/drawingml/2006/main">
               <a:ext uri="{FF2B5EF4-FFF2-40B4-BE49-F238E27FC236}">
-                <a16:creationId xmlns:a16="http://schemas.microsoft.com/office/drawing/2014/main" id="{B08B6956-5602-4556-8CF3-CAC618BFF4E4}"/>
+                <a16:creationId xmlns:a16="http://schemas.microsoft.com/office/drawing/2014/main" id="{BD9C88F6-2815-4CA1-91B2-CB52B00FF7BC}"/>
               </a:ext>
             </a:extLst>
           </p:cNvPr>
@@ -13935,7 +13943,7 @@
           <p:cNvPr id="20" name="">
             <a:extLst xmlns:a="http://schemas.openxmlformats.org/drawingml/2006/main">
               <a:ext uri="{FF2B5EF4-FFF2-40B4-BE49-F238E27FC236}">
-                <a16:creationId xmlns:a16="http://schemas.microsoft.com/office/drawing/2014/main" id="{1BE02E62-F4E4-4B22-AC62-931BDFC4EBB4}"/>
+                <a16:creationId xmlns:a16="http://schemas.microsoft.com/office/drawing/2014/main" id="{7D0F6C1A-0999-4CA4-93FA-0523BE85C566}"/>
               </a:ext>
             </a:extLst>
           </p:cNvPr>
@@ -13992,7 +14000,7 @@
           <p:cNvPr id="21" name="">
             <a:extLst xmlns:a="http://schemas.openxmlformats.org/drawingml/2006/main">
               <a:ext uri="{FF2B5EF4-FFF2-40B4-BE49-F238E27FC236}">
-                <a16:creationId xmlns:a16="http://schemas.microsoft.com/office/drawing/2014/main" id="{FE085D60-37FA-4A6E-9445-6BE2A2461145}"/>
+                <a16:creationId xmlns:a16="http://schemas.microsoft.com/office/drawing/2014/main" id="{76B09097-C95D-41D4-AB55-6B1B33A42BA4}"/>
               </a:ext>
             </a:extLst>
           </p:cNvPr>
@@ -14047,7 +14055,7 @@
     </p:spTree>
     <p:extLst>
       <p:ext uri="{BB962C8B-B14F-4D97-AF65-F5344CB8AC3E}">
-        <p14:creationId xmlns:p14="http://schemas.microsoft.com/office/powerpoint/2010/main" val="1754133631"/>
+        <p14:creationId xmlns:p14="http://schemas.microsoft.com/office/powerpoint/2010/main" val="1818590742"/>
       </p:ext>
     </p:extLst>
   </p:cSld>
